--- a/PT_AI_LogMining_Client_Deck.pptx
+++ b/PT_AI_LogMining_Client_Deck.pptx
@@ -1916,7 +1916,7 @@
         <p:spPr>
           <a:xfrm>
             <a:off x="457200" y="3337560"/>
-            <a:ext cx="6583680" cy="457200"/>
+            <a:ext cx="7315200" cy="457200"/>
           </a:xfrm>
           <a:prstGeom prst="rect">
             <a:avLst/>
@@ -1932,7 +1932,7 @@
               <a:buNone/>
             </a:pPr>
             <a:r>
-              <a:rPr lang="en-US" sz="1500" dirty="0">
+              <a:rPr lang="en-US" sz="1350" dirty="0">
                 <a:solidFill>
                   <a:srgbClr val="7B9CB8"/>
                 </a:solidFill>
@@ -1940,9 +1940,9 @@
                 <a:ea typeface="Calibri" pitchFamily="34" charset="-122"/>
                 <a:cs typeface="Calibri" pitchFamily="34" charset="-120"/>
               </a:rPr>
-              <a:t>Automated Root Cause Analysis across .BLG  ·  IIS  ·  LoadRunner</a:t>
-            </a:r>
-            <a:endParaRPr lang="en-US" sz="1500" dirty="0"/>
+              <a:t>Automated Root Cause Analysis  ·  .BLG  ·  IIS  ·  LoadRunner  ·  SQL Server</a:t>
+            </a:r>
+            <a:endParaRPr lang="en-US" sz="1350" dirty="0"/>
           </a:p>
         </p:txBody>
       </p:sp>
@@ -1955,7 +1955,7 @@
         <p:spPr>
           <a:xfrm>
             <a:off x="457200" y="4023360"/>
-            <a:ext cx="2194560" cy="502920"/>
+            <a:ext cx="1920240" cy="502920"/>
           </a:xfrm>
           <a:prstGeom prst="rect">
             <a:avLst/>
@@ -1982,7 +1982,7 @@
         <p:spPr>
           <a:xfrm>
             <a:off x="457200" y="4023360"/>
-            <a:ext cx="2194560" cy="502920"/>
+            <a:ext cx="1920240" cy="502920"/>
           </a:xfrm>
           <a:prstGeom prst="rect">
             <a:avLst/>
@@ -1998,14 +1998,14 @@
               <a:buNone/>
             </a:pPr>
             <a:r>
-              <a:rPr lang="en-US" sz="1300" b="1" dirty="0">
+              <a:rPr lang="en-US" sz="1100" b="1" dirty="0">
                 <a:solidFill>
                   <a:srgbClr val="FFFFFF"/>
                 </a:solidFill>
               </a:rPr>
               <a:t>40% Faster RCA</a:t>
             </a:r>
-            <a:endParaRPr lang="en-US" sz="1300" dirty="0"/>
+            <a:endParaRPr lang="en-US" sz="1100" dirty="0"/>
           </a:p>
         </p:txBody>
       </p:sp>
@@ -2017,8 +2017,8 @@
         </p:nvSpPr>
         <p:spPr>
           <a:xfrm>
-            <a:off x="2834640" y="4023360"/>
-            <a:ext cx="2377440" cy="502920"/>
+            <a:off x="2542032" y="4023360"/>
+            <a:ext cx="2286000" cy="502920"/>
           </a:xfrm>
           <a:prstGeom prst="rect">
             <a:avLst/>
@@ -2044,8 +2044,8 @@
         </p:nvSpPr>
         <p:spPr>
           <a:xfrm>
-            <a:off x="2834640" y="4023360"/>
-            <a:ext cx="2377440" cy="502920"/>
+            <a:off x="2542032" y="4023360"/>
+            <a:ext cx="2286000" cy="502920"/>
           </a:xfrm>
           <a:prstGeom prst="rect">
             <a:avLst/>
@@ -2061,14 +2061,14 @@
               <a:buNone/>
             </a:pPr>
             <a:r>
-              <a:rPr lang="en-US" sz="1300" b="1" dirty="0">
+              <a:rPr lang="en-US" sz="1100" b="1" dirty="0">
                 <a:solidFill>
                   <a:srgbClr val="FFFFFF"/>
                 </a:solidFill>
               </a:rPr>
               <a:t>Zero Manual Correlation</a:t>
             </a:r>
-            <a:endParaRPr lang="en-US" sz="1300" dirty="0"/>
+            <a:endParaRPr lang="en-US" sz="1100" dirty="0"/>
           </a:p>
         </p:txBody>
       </p:sp>
@@ -2080,8 +2080,8 @@
         </p:nvSpPr>
         <p:spPr>
           <a:xfrm>
-            <a:off x="5394960" y="4023360"/>
-            <a:ext cx="2011680" cy="502920"/>
+            <a:off x="4992624" y="4023360"/>
+            <a:ext cx="1920240" cy="502920"/>
           </a:xfrm>
           <a:prstGeom prst="rect">
             <a:avLst/>
@@ -2107,8 +2107,8 @@
         </p:nvSpPr>
         <p:spPr>
           <a:xfrm>
-            <a:off x="5394960" y="4023360"/>
-            <a:ext cx="2011680" cy="502920"/>
+            <a:off x="4992624" y="4023360"/>
+            <a:ext cx="1920240" cy="502920"/>
           </a:xfrm>
           <a:prstGeom prst="rect">
             <a:avLst/>
@@ -2129,7 +2129,70 @@
                   <a:srgbClr val="FFFFFF"/>
                 </a:solidFill>
               </a:rPr>
-              <a:t>3 Log Sources → 1 Report</a:t>
+              <a:t>4 Sources → 1 Report</a:t>
+            </a:r>
+            <a:endParaRPr lang="en-US" sz="1100" dirty="0"/>
+          </a:p>
+        </p:txBody>
+      </p:sp>
+      <p:sp>
+        <p:nvSpPr>
+          <p:cNvPr id="16" name="Shape 14"/>
+          <p:cNvSpPr/>
+          <p:nvPr/>
+        </p:nvSpPr>
+        <p:spPr>
+          <a:xfrm>
+            <a:off x="7077456" y="4023360"/>
+            <a:ext cx="1645920" cy="502920"/>
+          </a:xfrm>
+          <a:prstGeom prst="rect">
+            <a:avLst/>
+          </a:prstGeom>
+          <a:solidFill>
+            <a:srgbClr val="AB47BC">
+              <a:alpha val="90000"/>
+            </a:srgbClr>
+          </a:solidFill>
+          <a:ln w="12700">
+            <a:solidFill>
+              <a:srgbClr val="AB47BC"/>
+            </a:solidFill>
+            <a:prstDash val="solid"/>
+          </a:ln>
+        </p:spPr>
+      </p:sp>
+      <p:sp>
+        <p:nvSpPr>
+          <p:cNvPr id="17" name="Text 15"/>
+          <p:cNvSpPr/>
+          <p:nvPr/>
+        </p:nvSpPr>
+        <p:spPr>
+          <a:xfrm>
+            <a:off x="7077456" y="4023360"/>
+            <a:ext cx="1645920" cy="502920"/>
+          </a:xfrm>
+          <a:prstGeom prst="rect">
+            <a:avLst/>
+          </a:prstGeom>
+          <a:noFill/>
+          <a:ln/>
+        </p:spPr>
+        <p:txBody>
+          <a:bodyPr wrap="square" lIns="0" tIns="0" rIns="0" bIns="0" rtlCol="0" anchor="ctr"/>
+          <a:lstStyle/>
+          <a:p>
+            <a:pPr algn="ctr" indent="0" marL="0">
+              <a:buNone/>
+            </a:pPr>
+            <a:r>
+              <a:rPr lang="en-US" sz="1100" b="1" dirty="0">
+                <a:solidFill>
+                  <a:srgbClr val="FFFFFF"/>
+                </a:solidFill>
+              </a:rPr>
+              <a:t>Streamlit Web UI</a:t>
             </a:r>
             <a:endParaRPr lang="en-US" sz="1100" dirty="0"/>
           </a:p>
@@ -2137,7 +2200,7 @@
       </p:sp>
       <p:pic>
         <p:nvPicPr>
-          <p:cNvPr id="16" name="Image 0" descr="preencoded.png">    </p:cNvPr>
+          <p:cNvPr id="18" name="Image 0" descr="preencoded.png">    </p:cNvPr>
           <p:cNvPicPr>
             <a:picLocks noChangeAspect="1"/>
           </p:cNvPicPr>
@@ -2330,14 +2393,14 @@
               <a:buNone/>
             </a:pPr>
             <a:r>
-              <a:rPr lang="en-US" sz="1400" dirty="0">
+              <a:rPr lang="en-US" sz="1300" dirty="0">
                 <a:solidFill>
                   <a:srgbClr val="7B9CB8"/>
                 </a:solidFill>
               </a:rPr>
-              <a:t>The pipeline is built, tested, and running. Here's how we move forward.</a:t>
-            </a:r>
-            <a:endParaRPr lang="en-US" sz="1400" dirty="0"/>
+              <a:t>The pipeline is built, tested, on GitHub, and running with a web UI. Here's how we move forward.</a:t>
+            </a:r>
+            <a:endParaRPr lang="en-US" sz="1300" dirty="0"/>
           </a:p>
         </p:txBody>
       </p:sp>
@@ -2350,6 +2413,510 @@
         <p:spPr>
           <a:xfrm>
             <a:off x="365760" y="2788920"/>
+            <a:ext cx="1965960" cy="1920240"/>
+          </a:xfrm>
+          <a:prstGeom prst="rect">
+            <a:avLst/>
+          </a:prstGeom>
+          <a:solidFill>
+            <a:srgbClr val="0D2137"/>
+          </a:solidFill>
+          <a:ln w="25400">
+            <a:solidFill>
+              <a:srgbClr val="1E88E5"/>
+            </a:solidFill>
+            <a:prstDash val="solid"/>
+          </a:ln>
+          <a:effectLst>
+            <a:outerShdw sx="100000" sy="100000" kx="0" ky="0" algn="bl" rotWithShape="0" blurRad="101600" dist="38100" dir="8100000">
+              <a:srgbClr val="000000">
+                <a:alpha val="18000"/>
+              </a:srgbClr>
+            </a:outerShdw>
+          </a:effectLst>
+        </p:spPr>
+      </p:sp>
+      <p:sp>
+        <p:nvSpPr>
+          <p:cNvPr id="8" name="Shape 5"/>
+          <p:cNvSpPr/>
+          <p:nvPr/>
+        </p:nvSpPr>
+        <p:spPr>
+          <a:xfrm>
+            <a:off x="1078992" y="2889504"/>
+            <a:ext cx="530352" cy="438912"/>
+          </a:xfrm>
+          <a:prstGeom prst="rect">
+            <a:avLst/>
+          </a:prstGeom>
+          <a:solidFill>
+            <a:srgbClr val="1E88E5"/>
+          </a:solidFill>
+          <a:ln w="12700">
+            <a:solidFill>
+              <a:srgbClr val="1E88E5"/>
+            </a:solidFill>
+            <a:prstDash val="solid"/>
+          </a:ln>
+        </p:spPr>
+      </p:sp>
+      <p:sp>
+        <p:nvSpPr>
+          <p:cNvPr id="9" name="Text 6"/>
+          <p:cNvSpPr/>
+          <p:nvPr/>
+        </p:nvSpPr>
+        <p:spPr>
+          <a:xfrm>
+            <a:off x="1078992" y="2889504"/>
+            <a:ext cx="530352" cy="438912"/>
+          </a:xfrm>
+          <a:prstGeom prst="rect">
+            <a:avLst/>
+          </a:prstGeom>
+          <a:noFill/>
+          <a:ln/>
+        </p:spPr>
+        <p:txBody>
+          <a:bodyPr wrap="square" lIns="0" tIns="0" rIns="0" bIns="0" rtlCol="0" anchor="ctr"/>
+          <a:lstStyle/>
+          <a:p>
+            <a:pPr algn="ctr" indent="0" marL="0">
+              <a:buNone/>
+            </a:pPr>
+            <a:r>
+              <a:rPr lang="en-US" sz="1600" b="1" dirty="0">
+                <a:solidFill>
+                  <a:srgbClr val="0D1B2A"/>
+                </a:solidFill>
+              </a:rPr>
+              <a:t>1</a:t>
+            </a:r>
+            <a:endParaRPr lang="en-US" sz="1600" dirty="0"/>
+          </a:p>
+        </p:txBody>
+      </p:sp>
+      <p:sp>
+        <p:nvSpPr>
+          <p:cNvPr id="10" name="Text 7"/>
+          <p:cNvSpPr/>
+          <p:nvPr/>
+        </p:nvSpPr>
+        <p:spPr>
+          <a:xfrm>
+            <a:off x="457200" y="3419856"/>
+            <a:ext cx="1783080" cy="365760"/>
+          </a:xfrm>
+          <a:prstGeom prst="rect">
+            <a:avLst/>
+          </a:prstGeom>
+          <a:noFill/>
+          <a:ln/>
+        </p:spPr>
+        <p:txBody>
+          <a:bodyPr wrap="square" rtlCol="0" anchor="ctr"/>
+          <a:lstStyle/>
+          <a:p>
+            <a:pPr algn="ctr" indent="0" marL="0">
+              <a:buNone/>
+            </a:pPr>
+            <a:r>
+              <a:rPr lang="en-US" sz="1100" b="1" dirty="0">
+                <a:solidFill>
+                  <a:srgbClr val="FFFFFF"/>
+                </a:solidFill>
+              </a:rPr>
+              <a:t>Pilot Run</a:t>
+            </a:r>
+            <a:endParaRPr lang="en-US" sz="1100" dirty="0"/>
+          </a:p>
+        </p:txBody>
+      </p:sp>
+      <p:sp>
+        <p:nvSpPr>
+          <p:cNvPr id="11" name="Text 8"/>
+          <p:cNvSpPr/>
+          <p:nvPr/>
+        </p:nvSpPr>
+        <p:spPr>
+          <a:xfrm>
+            <a:off x="457200" y="3822192"/>
+            <a:ext cx="1783080" cy="822960"/>
+          </a:xfrm>
+          <a:prstGeom prst="rect">
+            <a:avLst/>
+          </a:prstGeom>
+          <a:noFill/>
+          <a:ln/>
+        </p:spPr>
+        <p:txBody>
+          <a:bodyPr wrap="square" rtlCol="0" anchor="ctr"/>
+          <a:lstStyle/>
+          <a:p>
+            <a:pPr algn="ctr" indent="0" marL="0">
+              <a:lnSpc>
+                <a:spcPct val="125000"/>
+              </a:lnSpc>
+              <a:buNone/>
+            </a:pPr>
+            <a:r>
+              <a:rPr lang="en-US" sz="950" dirty="0">
+                <a:solidFill>
+                  <a:srgbClr val="7B9CB8"/>
+                </a:solidFill>
+              </a:rPr>
+              <a:t>Open Streamlit UI, upload your real log files. Get a full RCA report in &lt; 30 seconds.</a:t>
+            </a:r>
+            <a:endParaRPr lang="en-US" sz="950" dirty="0"/>
+          </a:p>
+        </p:txBody>
+      </p:sp>
+      <p:sp>
+        <p:nvSpPr>
+          <p:cNvPr id="12" name="Shape 9"/>
+          <p:cNvSpPr/>
+          <p:nvPr/>
+        </p:nvSpPr>
+        <p:spPr>
+          <a:xfrm>
+            <a:off x="2514600" y="2788920"/>
+            <a:ext cx="1965960" cy="1920240"/>
+          </a:xfrm>
+          <a:prstGeom prst="rect">
+            <a:avLst/>
+          </a:prstGeom>
+          <a:solidFill>
+            <a:srgbClr val="0D2137"/>
+          </a:solidFill>
+          <a:ln w="25400">
+            <a:solidFill>
+              <a:srgbClr val="00C9A7"/>
+            </a:solidFill>
+            <a:prstDash val="solid"/>
+          </a:ln>
+          <a:effectLst>
+            <a:outerShdw sx="100000" sy="100000" kx="0" ky="0" algn="bl" rotWithShape="0" blurRad="101600" dist="38100" dir="8100000">
+              <a:srgbClr val="000000">
+                <a:alpha val="18000"/>
+              </a:srgbClr>
+            </a:outerShdw>
+          </a:effectLst>
+        </p:spPr>
+      </p:sp>
+      <p:sp>
+        <p:nvSpPr>
+          <p:cNvPr id="13" name="Shape 10"/>
+          <p:cNvSpPr/>
+          <p:nvPr/>
+        </p:nvSpPr>
+        <p:spPr>
+          <a:xfrm>
+            <a:off x="3227832" y="2889504"/>
+            <a:ext cx="530352" cy="438912"/>
+          </a:xfrm>
+          <a:prstGeom prst="rect">
+            <a:avLst/>
+          </a:prstGeom>
+          <a:solidFill>
+            <a:srgbClr val="00C9A7"/>
+          </a:solidFill>
+          <a:ln w="12700">
+            <a:solidFill>
+              <a:srgbClr val="00C9A7"/>
+            </a:solidFill>
+            <a:prstDash val="solid"/>
+          </a:ln>
+        </p:spPr>
+      </p:sp>
+      <p:sp>
+        <p:nvSpPr>
+          <p:cNvPr id="14" name="Text 11"/>
+          <p:cNvSpPr/>
+          <p:nvPr/>
+        </p:nvSpPr>
+        <p:spPr>
+          <a:xfrm>
+            <a:off x="3227832" y="2889504"/>
+            <a:ext cx="530352" cy="438912"/>
+          </a:xfrm>
+          <a:prstGeom prst="rect">
+            <a:avLst/>
+          </a:prstGeom>
+          <a:noFill/>
+          <a:ln/>
+        </p:spPr>
+        <p:txBody>
+          <a:bodyPr wrap="square" lIns="0" tIns="0" rIns="0" bIns="0" rtlCol="0" anchor="ctr"/>
+          <a:lstStyle/>
+          <a:p>
+            <a:pPr algn="ctr" indent="0" marL="0">
+              <a:buNone/>
+            </a:pPr>
+            <a:r>
+              <a:rPr lang="en-US" sz="1600" b="1" dirty="0">
+                <a:solidFill>
+                  <a:srgbClr val="0D1B2A"/>
+                </a:solidFill>
+              </a:rPr>
+              <a:t>2</a:t>
+            </a:r>
+            <a:endParaRPr lang="en-US" sz="1600" dirty="0"/>
+          </a:p>
+        </p:txBody>
+      </p:sp>
+      <p:sp>
+        <p:nvSpPr>
+          <p:cNvPr id="15" name="Text 12"/>
+          <p:cNvSpPr/>
+          <p:nvPr/>
+        </p:nvSpPr>
+        <p:spPr>
+          <a:xfrm>
+            <a:off x="2606040" y="3419856"/>
+            <a:ext cx="1783080" cy="365760"/>
+          </a:xfrm>
+          <a:prstGeom prst="rect">
+            <a:avLst/>
+          </a:prstGeom>
+          <a:noFill/>
+          <a:ln/>
+        </p:spPr>
+        <p:txBody>
+          <a:bodyPr wrap="square" rtlCol="0" anchor="ctr"/>
+          <a:lstStyle/>
+          <a:p>
+            <a:pPr algn="ctr" indent="0" marL="0">
+              <a:buNone/>
+            </a:pPr>
+            <a:r>
+              <a:rPr lang="en-US" sz="1100" b="1" dirty="0">
+                <a:solidFill>
+                  <a:srgbClr val="FFFFFF"/>
+                </a:solidFill>
+              </a:rPr>
+              <a:t>Tune SLAs</a:t>
+            </a:r>
+            <a:endParaRPr lang="en-US" sz="1100" dirty="0"/>
+          </a:p>
+        </p:txBody>
+      </p:sp>
+      <p:sp>
+        <p:nvSpPr>
+          <p:cNvPr id="16" name="Text 13"/>
+          <p:cNvSpPr/>
+          <p:nvPr/>
+        </p:nvSpPr>
+        <p:spPr>
+          <a:xfrm>
+            <a:off x="2606040" y="3822192"/>
+            <a:ext cx="1783080" cy="822960"/>
+          </a:xfrm>
+          <a:prstGeom prst="rect">
+            <a:avLst/>
+          </a:prstGeom>
+          <a:noFill/>
+          <a:ln/>
+        </p:spPr>
+        <p:txBody>
+          <a:bodyPr wrap="square" rtlCol="0" anchor="ctr"/>
+          <a:lstStyle/>
+          <a:p>
+            <a:pPr algn="ctr" indent="0" marL="0">
+              <a:lnSpc>
+                <a:spcPct val="125000"/>
+              </a:lnSpc>
+              <a:buNone/>
+            </a:pPr>
+            <a:r>
+              <a:rPr lang="en-US" sz="950" dirty="0">
+                <a:solidFill>
+                  <a:srgbClr val="7B9CB8"/>
+                </a:solidFill>
+              </a:rPr>
+              <a:t>Update config.yaml with your SLA thresholds — latency, CPU, SQL PLE, deadlocks.</a:t>
+            </a:r>
+            <a:endParaRPr lang="en-US" sz="950" dirty="0"/>
+          </a:p>
+        </p:txBody>
+      </p:sp>
+      <p:sp>
+        <p:nvSpPr>
+          <p:cNvPr id="17" name="Shape 14"/>
+          <p:cNvSpPr/>
+          <p:nvPr/>
+        </p:nvSpPr>
+        <p:spPr>
+          <a:xfrm>
+            <a:off x="4663440" y="2788920"/>
+            <a:ext cx="1965960" cy="1920240"/>
+          </a:xfrm>
+          <a:prstGeom prst="rect">
+            <a:avLst/>
+          </a:prstGeom>
+          <a:solidFill>
+            <a:srgbClr val="0D2137"/>
+          </a:solidFill>
+          <a:ln w="25400">
+            <a:solidFill>
+              <a:srgbClr val="FFB300"/>
+            </a:solidFill>
+            <a:prstDash val="solid"/>
+          </a:ln>
+          <a:effectLst>
+            <a:outerShdw sx="100000" sy="100000" kx="0" ky="0" algn="bl" rotWithShape="0" blurRad="101600" dist="38100" dir="8100000">
+              <a:srgbClr val="000000">
+                <a:alpha val="18000"/>
+              </a:srgbClr>
+            </a:outerShdw>
+          </a:effectLst>
+        </p:spPr>
+      </p:sp>
+      <p:sp>
+        <p:nvSpPr>
+          <p:cNvPr id="18" name="Shape 15"/>
+          <p:cNvSpPr/>
+          <p:nvPr/>
+        </p:nvSpPr>
+        <p:spPr>
+          <a:xfrm>
+            <a:off x="5376672" y="2889504"/>
+            <a:ext cx="530352" cy="438912"/>
+          </a:xfrm>
+          <a:prstGeom prst="rect">
+            <a:avLst/>
+          </a:prstGeom>
+          <a:solidFill>
+            <a:srgbClr val="FFB300"/>
+          </a:solidFill>
+          <a:ln w="12700">
+            <a:solidFill>
+              <a:srgbClr val="FFB300"/>
+            </a:solidFill>
+            <a:prstDash val="solid"/>
+          </a:ln>
+        </p:spPr>
+      </p:sp>
+      <p:sp>
+        <p:nvSpPr>
+          <p:cNvPr id="19" name="Text 16"/>
+          <p:cNvSpPr/>
+          <p:nvPr/>
+        </p:nvSpPr>
+        <p:spPr>
+          <a:xfrm>
+            <a:off x="5376672" y="2889504"/>
+            <a:ext cx="530352" cy="438912"/>
+          </a:xfrm>
+          <a:prstGeom prst="rect">
+            <a:avLst/>
+          </a:prstGeom>
+          <a:noFill/>
+          <a:ln/>
+        </p:spPr>
+        <p:txBody>
+          <a:bodyPr wrap="square" lIns="0" tIns="0" rIns="0" bIns="0" rtlCol="0" anchor="ctr"/>
+          <a:lstStyle/>
+          <a:p>
+            <a:pPr algn="ctr" indent="0" marL="0">
+              <a:buNone/>
+            </a:pPr>
+            <a:r>
+              <a:rPr lang="en-US" sz="1600" b="1" dirty="0">
+                <a:solidFill>
+                  <a:srgbClr val="0D1B2A"/>
+                </a:solidFill>
+              </a:rPr>
+              <a:t>3</a:t>
+            </a:r>
+            <a:endParaRPr lang="en-US" sz="1600" dirty="0"/>
+          </a:p>
+        </p:txBody>
+      </p:sp>
+      <p:sp>
+        <p:nvSpPr>
+          <p:cNvPr id="20" name="Text 17"/>
+          <p:cNvSpPr/>
+          <p:nvPr/>
+        </p:nvSpPr>
+        <p:spPr>
+          <a:xfrm>
+            <a:off x="4754880" y="3419856"/>
+            <a:ext cx="1783080" cy="365760"/>
+          </a:xfrm>
+          <a:prstGeom prst="rect">
+            <a:avLst/>
+          </a:prstGeom>
+          <a:noFill/>
+          <a:ln/>
+        </p:spPr>
+        <p:txBody>
+          <a:bodyPr wrap="square" rtlCol="0" anchor="ctr"/>
+          <a:lstStyle/>
+          <a:p>
+            <a:pPr algn="ctr" indent="0" marL="0">
+              <a:buNone/>
+            </a:pPr>
+            <a:r>
+              <a:rPr lang="en-US" sz="1100" b="1" dirty="0">
+                <a:solidFill>
+                  <a:srgbClr val="FFFFFF"/>
+                </a:solidFill>
+              </a:rPr>
+              <a:t>Add OpenAI Key</a:t>
+            </a:r>
+            <a:endParaRPr lang="en-US" sz="1100" dirty="0"/>
+          </a:p>
+        </p:txBody>
+      </p:sp>
+      <p:sp>
+        <p:nvSpPr>
+          <p:cNvPr id="21" name="Text 18"/>
+          <p:cNvSpPr/>
+          <p:nvPr/>
+        </p:nvSpPr>
+        <p:spPr>
+          <a:xfrm>
+            <a:off x="4754880" y="3822192"/>
+            <a:ext cx="1783080" cy="822960"/>
+          </a:xfrm>
+          <a:prstGeom prst="rect">
+            <a:avLst/>
+          </a:prstGeom>
+          <a:noFill/>
+          <a:ln/>
+        </p:spPr>
+        <p:txBody>
+          <a:bodyPr wrap="square" rtlCol="0" anchor="ctr"/>
+          <a:lstStyle/>
+          <a:p>
+            <a:pPr algn="ctr" indent="0" marL="0">
+              <a:lnSpc>
+                <a:spcPct val="125000"/>
+              </a:lnSpc>
+              <a:buNone/>
+            </a:pPr>
+            <a:r>
+              <a:rPr lang="en-US" sz="950" dirty="0">
+                <a:solidFill>
+                  <a:srgbClr val="7B9CB8"/>
+                </a:solidFill>
+              </a:rPr>
+              <a:t>Set OPENAI_API_KEY in .env to unlock GPT-4o semantic pattern detection and causal RCA.</a:t>
+            </a:r>
+            <a:endParaRPr lang="en-US" sz="950" dirty="0"/>
+          </a:p>
+        </p:txBody>
+      </p:sp>
+      <p:sp>
+        <p:nvSpPr>
+          <p:cNvPr id="22" name="Shape 19"/>
+          <p:cNvSpPr/>
+          <p:nvPr/>
+        </p:nvSpPr>
+        <p:spPr>
+          <a:xfrm>
+            <a:off x="6812280" y="2788920"/>
             <a:ext cx="1965960" cy="1920240"/>
           </a:xfrm>
           <a:prstGeom prst="rect">
@@ -2375,13 +2942,13 @@
       </p:sp>
       <p:sp>
         <p:nvSpPr>
-          <p:cNvPr id="8" name="Shape 5"/>
-          <p:cNvSpPr/>
-          <p:nvPr/>
-        </p:nvSpPr>
-        <p:spPr>
-          <a:xfrm>
-            <a:off x="1078992" y="2889504"/>
+          <p:cNvPr id="23" name="Shape 20"/>
+          <p:cNvSpPr/>
+          <p:nvPr/>
+        </p:nvSpPr>
+        <p:spPr>
+          <a:xfrm>
+            <a:off x="7525512" y="2889504"/>
             <a:ext cx="530352" cy="438912"/>
           </a:xfrm>
           <a:prstGeom prst="rect">
@@ -2400,13 +2967,13 @@
       </p:sp>
       <p:sp>
         <p:nvSpPr>
-          <p:cNvPr id="9" name="Text 6"/>
-          <p:cNvSpPr/>
-          <p:nvPr/>
-        </p:nvSpPr>
-        <p:spPr>
-          <a:xfrm>
-            <a:off x="1078992" y="2889504"/>
+          <p:cNvPr id="24" name="Text 21"/>
+          <p:cNvSpPr/>
+          <p:nvPr/>
+        </p:nvSpPr>
+        <p:spPr>
+          <a:xfrm>
+            <a:off x="7525512" y="2889504"/>
             <a:ext cx="530352" cy="438912"/>
           </a:xfrm>
           <a:prstGeom prst="rect">
@@ -2428,7 +2995,7 @@
                   <a:srgbClr val="0D1B2A"/>
                 </a:solidFill>
               </a:rPr>
-              <a:t>1</a:t>
+              <a:t>4</a:t>
             </a:r>
             <a:endParaRPr lang="en-US" sz="1600" dirty="0"/>
           </a:p>
@@ -2436,13 +3003,13 @@
       </p:sp>
       <p:sp>
         <p:nvSpPr>
-          <p:cNvPr id="10" name="Text 7"/>
-          <p:cNvSpPr/>
-          <p:nvPr/>
-        </p:nvSpPr>
-        <p:spPr>
-          <a:xfrm>
-            <a:off x="457200" y="3419856"/>
+          <p:cNvPr id="25" name="Text 22"/>
+          <p:cNvSpPr/>
+          <p:nvPr/>
+        </p:nvSpPr>
+        <p:spPr>
+          <a:xfrm>
+            <a:off x="6903720" y="3419856"/>
             <a:ext cx="1783080" cy="365760"/>
           </a:xfrm>
           <a:prstGeom prst="rect">
@@ -2464,7 +3031,7 @@
                   <a:srgbClr val="FFFFFF"/>
                 </a:solidFill>
               </a:rPr>
-              <a:t>Pilot Run</a:t>
+              <a:t>Integrate &amp; Scale</a:t>
             </a:r>
             <a:endParaRPr lang="en-US" sz="1100" dirty="0"/>
           </a:p>
@@ -2472,13 +3039,13 @@
       </p:sp>
       <p:sp>
         <p:nvSpPr>
-          <p:cNvPr id="11" name="Text 8"/>
-          <p:cNvSpPr/>
-          <p:nvPr/>
-        </p:nvSpPr>
-        <p:spPr>
-          <a:xfrm>
-            <a:off x="457200" y="3822192"/>
+          <p:cNvPr id="26" name="Text 23"/>
+          <p:cNvSpPr/>
+          <p:nvPr/>
+        </p:nvSpPr>
+        <p:spPr>
+          <a:xfrm>
+            <a:off x="6903720" y="3822192"/>
             <a:ext cx="1783080" cy="822960"/>
           </a:xfrm>
           <a:prstGeom prst="rect">
@@ -2503,511 +3070,7 @@
                   <a:srgbClr val="7B9CB8"/>
                 </a:solidFill>
               </a:rPr>
-              <a:t>Drop your real .BLG, IIS &amp; LR files into the pipeline. Get a live report in &lt; 30 seconds.</a:t>
-            </a:r>
-            <a:endParaRPr lang="en-US" sz="950" dirty="0"/>
-          </a:p>
-        </p:txBody>
-      </p:sp>
-      <p:sp>
-        <p:nvSpPr>
-          <p:cNvPr id="12" name="Shape 9"/>
-          <p:cNvSpPr/>
-          <p:nvPr/>
-        </p:nvSpPr>
-        <p:spPr>
-          <a:xfrm>
-            <a:off x="2514600" y="2788920"/>
-            <a:ext cx="1965960" cy="1920240"/>
-          </a:xfrm>
-          <a:prstGeom prst="rect">
-            <a:avLst/>
-          </a:prstGeom>
-          <a:solidFill>
-            <a:srgbClr val="0D2137"/>
-          </a:solidFill>
-          <a:ln w="25400">
-            <a:solidFill>
-              <a:srgbClr val="00BCD4"/>
-            </a:solidFill>
-            <a:prstDash val="solid"/>
-          </a:ln>
-          <a:effectLst>
-            <a:outerShdw sx="100000" sy="100000" kx="0" ky="0" algn="bl" rotWithShape="0" blurRad="101600" dist="38100" dir="8100000">
-              <a:srgbClr val="000000">
-                <a:alpha val="18000"/>
-              </a:srgbClr>
-            </a:outerShdw>
-          </a:effectLst>
-        </p:spPr>
-      </p:sp>
-      <p:sp>
-        <p:nvSpPr>
-          <p:cNvPr id="13" name="Shape 10"/>
-          <p:cNvSpPr/>
-          <p:nvPr/>
-        </p:nvSpPr>
-        <p:spPr>
-          <a:xfrm>
-            <a:off x="3227832" y="2889504"/>
-            <a:ext cx="530352" cy="438912"/>
-          </a:xfrm>
-          <a:prstGeom prst="rect">
-            <a:avLst/>
-          </a:prstGeom>
-          <a:solidFill>
-            <a:srgbClr val="00BCD4"/>
-          </a:solidFill>
-          <a:ln w="12700">
-            <a:solidFill>
-              <a:srgbClr val="00BCD4"/>
-            </a:solidFill>
-            <a:prstDash val="solid"/>
-          </a:ln>
-        </p:spPr>
-      </p:sp>
-      <p:sp>
-        <p:nvSpPr>
-          <p:cNvPr id="14" name="Text 11"/>
-          <p:cNvSpPr/>
-          <p:nvPr/>
-        </p:nvSpPr>
-        <p:spPr>
-          <a:xfrm>
-            <a:off x="3227832" y="2889504"/>
-            <a:ext cx="530352" cy="438912"/>
-          </a:xfrm>
-          <a:prstGeom prst="rect">
-            <a:avLst/>
-          </a:prstGeom>
-          <a:noFill/>
-          <a:ln/>
-        </p:spPr>
-        <p:txBody>
-          <a:bodyPr wrap="square" lIns="0" tIns="0" rIns="0" bIns="0" rtlCol="0" anchor="ctr"/>
-          <a:lstStyle/>
-          <a:p>
-            <a:pPr algn="ctr" indent="0" marL="0">
-              <a:buNone/>
-            </a:pPr>
-            <a:r>
-              <a:rPr lang="en-US" sz="1600" b="1" dirty="0">
-                <a:solidFill>
-                  <a:srgbClr val="0D1B2A"/>
-                </a:solidFill>
-              </a:rPr>
-              <a:t>2</a:t>
-            </a:r>
-            <a:endParaRPr lang="en-US" sz="1600" dirty="0"/>
-          </a:p>
-        </p:txBody>
-      </p:sp>
-      <p:sp>
-        <p:nvSpPr>
-          <p:cNvPr id="15" name="Text 12"/>
-          <p:cNvSpPr/>
-          <p:nvPr/>
-        </p:nvSpPr>
-        <p:spPr>
-          <a:xfrm>
-            <a:off x="2606040" y="3419856"/>
-            <a:ext cx="1783080" cy="365760"/>
-          </a:xfrm>
-          <a:prstGeom prst="rect">
-            <a:avLst/>
-          </a:prstGeom>
-          <a:noFill/>
-          <a:ln/>
-        </p:spPr>
-        <p:txBody>
-          <a:bodyPr wrap="square" rtlCol="0" anchor="ctr"/>
-          <a:lstStyle/>
-          <a:p>
-            <a:pPr algn="ctr" indent="0" marL="0">
-              <a:buNone/>
-            </a:pPr>
-            <a:r>
-              <a:rPr lang="en-US" sz="1100" b="1" dirty="0">
-                <a:solidFill>
-                  <a:srgbClr val="FFFFFF"/>
-                </a:solidFill>
-              </a:rPr>
-              <a:t>Tune SLAs</a:t>
-            </a:r>
-            <a:endParaRPr lang="en-US" sz="1100" dirty="0"/>
-          </a:p>
-        </p:txBody>
-      </p:sp>
-      <p:sp>
-        <p:nvSpPr>
-          <p:cNvPr id="16" name="Text 13"/>
-          <p:cNvSpPr/>
-          <p:nvPr/>
-        </p:nvSpPr>
-        <p:spPr>
-          <a:xfrm>
-            <a:off x="2606040" y="3822192"/>
-            <a:ext cx="1783080" cy="822960"/>
-          </a:xfrm>
-          <a:prstGeom prst="rect">
-            <a:avLst/>
-          </a:prstGeom>
-          <a:noFill/>
-          <a:ln/>
-        </p:spPr>
-        <p:txBody>
-          <a:bodyPr wrap="square" rtlCol="0" anchor="ctr"/>
-          <a:lstStyle/>
-          <a:p>
-            <a:pPr algn="ctr" indent="0" marL="0">
-              <a:lnSpc>
-                <a:spcPct val="125000"/>
-              </a:lnSpc>
-              <a:buNone/>
-            </a:pPr>
-            <a:r>
-              <a:rPr lang="en-US" sz="950" dirty="0">
-                <a:solidFill>
-                  <a:srgbClr val="7B9CB8"/>
-                </a:solidFill>
-              </a:rPr>
-              <a:t>Update config.yaml with your actual SLA thresholds. No code changes needed.</a:t>
-            </a:r>
-            <a:endParaRPr lang="en-US" sz="950" dirty="0"/>
-          </a:p>
-        </p:txBody>
-      </p:sp>
-      <p:sp>
-        <p:nvSpPr>
-          <p:cNvPr id="17" name="Shape 14"/>
-          <p:cNvSpPr/>
-          <p:nvPr/>
-        </p:nvSpPr>
-        <p:spPr>
-          <a:xfrm>
-            <a:off x="4663440" y="2788920"/>
-            <a:ext cx="1965960" cy="1920240"/>
-          </a:xfrm>
-          <a:prstGeom prst="rect">
-            <a:avLst/>
-          </a:prstGeom>
-          <a:solidFill>
-            <a:srgbClr val="0D2137"/>
-          </a:solidFill>
-          <a:ln w="25400">
-            <a:solidFill>
-              <a:srgbClr val="00BCD4"/>
-            </a:solidFill>
-            <a:prstDash val="solid"/>
-          </a:ln>
-          <a:effectLst>
-            <a:outerShdw sx="100000" sy="100000" kx="0" ky="0" algn="bl" rotWithShape="0" blurRad="101600" dist="38100" dir="8100000">
-              <a:srgbClr val="000000">
-                <a:alpha val="18000"/>
-              </a:srgbClr>
-            </a:outerShdw>
-          </a:effectLst>
-        </p:spPr>
-      </p:sp>
-      <p:sp>
-        <p:nvSpPr>
-          <p:cNvPr id="18" name="Shape 15"/>
-          <p:cNvSpPr/>
-          <p:nvPr/>
-        </p:nvSpPr>
-        <p:spPr>
-          <a:xfrm>
-            <a:off x="5376672" y="2889504"/>
-            <a:ext cx="530352" cy="438912"/>
-          </a:xfrm>
-          <a:prstGeom prst="rect">
-            <a:avLst/>
-          </a:prstGeom>
-          <a:solidFill>
-            <a:srgbClr val="00BCD4"/>
-          </a:solidFill>
-          <a:ln w="12700">
-            <a:solidFill>
-              <a:srgbClr val="00BCD4"/>
-            </a:solidFill>
-            <a:prstDash val="solid"/>
-          </a:ln>
-        </p:spPr>
-      </p:sp>
-      <p:sp>
-        <p:nvSpPr>
-          <p:cNvPr id="19" name="Text 16"/>
-          <p:cNvSpPr/>
-          <p:nvPr/>
-        </p:nvSpPr>
-        <p:spPr>
-          <a:xfrm>
-            <a:off x="5376672" y="2889504"/>
-            <a:ext cx="530352" cy="438912"/>
-          </a:xfrm>
-          <a:prstGeom prst="rect">
-            <a:avLst/>
-          </a:prstGeom>
-          <a:noFill/>
-          <a:ln/>
-        </p:spPr>
-        <p:txBody>
-          <a:bodyPr wrap="square" lIns="0" tIns="0" rIns="0" bIns="0" rtlCol="0" anchor="ctr"/>
-          <a:lstStyle/>
-          <a:p>
-            <a:pPr algn="ctr" indent="0" marL="0">
-              <a:buNone/>
-            </a:pPr>
-            <a:r>
-              <a:rPr lang="en-US" sz="1600" b="1" dirty="0">
-                <a:solidFill>
-                  <a:srgbClr val="0D1B2A"/>
-                </a:solidFill>
-              </a:rPr>
-              <a:t>3</a:t>
-            </a:r>
-            <a:endParaRPr lang="en-US" sz="1600" dirty="0"/>
-          </a:p>
-        </p:txBody>
-      </p:sp>
-      <p:sp>
-        <p:nvSpPr>
-          <p:cNvPr id="20" name="Text 17"/>
-          <p:cNvSpPr/>
-          <p:nvPr/>
-        </p:nvSpPr>
-        <p:spPr>
-          <a:xfrm>
-            <a:off x="4754880" y="3419856"/>
-            <a:ext cx="1783080" cy="365760"/>
-          </a:xfrm>
-          <a:prstGeom prst="rect">
-            <a:avLst/>
-          </a:prstGeom>
-          <a:noFill/>
-          <a:ln/>
-        </p:spPr>
-        <p:txBody>
-          <a:bodyPr wrap="square" rtlCol="0" anchor="ctr"/>
-          <a:lstStyle/>
-          <a:p>
-            <a:pPr algn="ctr" indent="0" marL="0">
-              <a:buNone/>
-            </a:pPr>
-            <a:r>
-              <a:rPr lang="en-US" sz="1100" b="1" dirty="0">
-                <a:solidFill>
-                  <a:srgbClr val="FFFFFF"/>
-                </a:solidFill>
-              </a:rPr>
-              <a:t>Add OpenAI Key</a:t>
-            </a:r>
-            <a:endParaRPr lang="en-US" sz="1100" dirty="0"/>
-          </a:p>
-        </p:txBody>
-      </p:sp>
-      <p:sp>
-        <p:nvSpPr>
-          <p:cNvPr id="21" name="Text 18"/>
-          <p:cNvSpPr/>
-          <p:nvPr/>
-        </p:nvSpPr>
-        <p:spPr>
-          <a:xfrm>
-            <a:off x="4754880" y="3822192"/>
-            <a:ext cx="1783080" cy="822960"/>
-          </a:xfrm>
-          <a:prstGeom prst="rect">
-            <a:avLst/>
-          </a:prstGeom>
-          <a:noFill/>
-          <a:ln/>
-        </p:spPr>
-        <p:txBody>
-          <a:bodyPr wrap="square" rtlCol="0" anchor="ctr"/>
-          <a:lstStyle/>
-          <a:p>
-            <a:pPr algn="ctr" indent="0" marL="0">
-              <a:lnSpc>
-                <a:spcPct val="125000"/>
-              </a:lnSpc>
-              <a:buNone/>
-            </a:pPr>
-            <a:r>
-              <a:rPr lang="en-US" sz="950" dirty="0">
-                <a:solidFill>
-                  <a:srgbClr val="7B9CB8"/>
-                </a:solidFill>
-              </a:rPr>
-              <a:t>Unlock GPT-4o semantic analysis for richer pattern detection and full causal RCA.</a:t>
-            </a:r>
-            <a:endParaRPr lang="en-US" sz="950" dirty="0"/>
-          </a:p>
-        </p:txBody>
-      </p:sp>
-      <p:sp>
-        <p:nvSpPr>
-          <p:cNvPr id="22" name="Shape 19"/>
-          <p:cNvSpPr/>
-          <p:nvPr/>
-        </p:nvSpPr>
-        <p:spPr>
-          <a:xfrm>
-            <a:off x="6812280" y="2788920"/>
-            <a:ext cx="1965960" cy="1920240"/>
-          </a:xfrm>
-          <a:prstGeom prst="rect">
-            <a:avLst/>
-          </a:prstGeom>
-          <a:solidFill>
-            <a:srgbClr val="0D2137"/>
-          </a:solidFill>
-          <a:ln w="25400">
-            <a:solidFill>
-              <a:srgbClr val="00BCD4"/>
-            </a:solidFill>
-            <a:prstDash val="solid"/>
-          </a:ln>
-          <a:effectLst>
-            <a:outerShdw sx="100000" sy="100000" kx="0" ky="0" algn="bl" rotWithShape="0" blurRad="101600" dist="38100" dir="8100000">
-              <a:srgbClr val="000000">
-                <a:alpha val="18000"/>
-              </a:srgbClr>
-            </a:outerShdw>
-          </a:effectLst>
-        </p:spPr>
-      </p:sp>
-      <p:sp>
-        <p:nvSpPr>
-          <p:cNvPr id="23" name="Shape 20"/>
-          <p:cNvSpPr/>
-          <p:nvPr/>
-        </p:nvSpPr>
-        <p:spPr>
-          <a:xfrm>
-            <a:off x="7525512" y="2889504"/>
-            <a:ext cx="530352" cy="438912"/>
-          </a:xfrm>
-          <a:prstGeom prst="rect">
-            <a:avLst/>
-          </a:prstGeom>
-          <a:solidFill>
-            <a:srgbClr val="00BCD4"/>
-          </a:solidFill>
-          <a:ln w="12700">
-            <a:solidFill>
-              <a:srgbClr val="00BCD4"/>
-            </a:solidFill>
-            <a:prstDash val="solid"/>
-          </a:ln>
-        </p:spPr>
-      </p:sp>
-      <p:sp>
-        <p:nvSpPr>
-          <p:cNvPr id="24" name="Text 21"/>
-          <p:cNvSpPr/>
-          <p:nvPr/>
-        </p:nvSpPr>
-        <p:spPr>
-          <a:xfrm>
-            <a:off x="7525512" y="2889504"/>
-            <a:ext cx="530352" cy="438912"/>
-          </a:xfrm>
-          <a:prstGeom prst="rect">
-            <a:avLst/>
-          </a:prstGeom>
-          <a:noFill/>
-          <a:ln/>
-        </p:spPr>
-        <p:txBody>
-          <a:bodyPr wrap="square" lIns="0" tIns="0" rIns="0" bIns="0" rtlCol="0" anchor="ctr"/>
-          <a:lstStyle/>
-          <a:p>
-            <a:pPr algn="ctr" indent="0" marL="0">
-              <a:buNone/>
-            </a:pPr>
-            <a:r>
-              <a:rPr lang="en-US" sz="1600" b="1" dirty="0">
-                <a:solidFill>
-                  <a:srgbClr val="0D1B2A"/>
-                </a:solidFill>
-              </a:rPr>
-              <a:t>4</a:t>
-            </a:r>
-            <a:endParaRPr lang="en-US" sz="1600" dirty="0"/>
-          </a:p>
-        </p:txBody>
-      </p:sp>
-      <p:sp>
-        <p:nvSpPr>
-          <p:cNvPr id="25" name="Text 22"/>
-          <p:cNvSpPr/>
-          <p:nvPr/>
-        </p:nvSpPr>
-        <p:spPr>
-          <a:xfrm>
-            <a:off x="6903720" y="3419856"/>
-            <a:ext cx="1783080" cy="365760"/>
-          </a:xfrm>
-          <a:prstGeom prst="rect">
-            <a:avLst/>
-          </a:prstGeom>
-          <a:noFill/>
-          <a:ln/>
-        </p:spPr>
-        <p:txBody>
-          <a:bodyPr wrap="square" rtlCol="0" anchor="ctr"/>
-          <a:lstStyle/>
-          <a:p>
-            <a:pPr algn="ctr" indent="0" marL="0">
-              <a:buNone/>
-            </a:pPr>
-            <a:r>
-              <a:rPr lang="en-US" sz="1100" b="1" dirty="0">
-                <a:solidFill>
-                  <a:srgbClr val="FFFFFF"/>
-                </a:solidFill>
-              </a:rPr>
-              <a:t>Integrate &amp; Scale</a:t>
-            </a:r>
-            <a:endParaRPr lang="en-US" sz="1100" dirty="0"/>
-          </a:p>
-        </p:txBody>
-      </p:sp>
-      <p:sp>
-        <p:nvSpPr>
-          <p:cNvPr id="26" name="Text 23"/>
-          <p:cNvSpPr/>
-          <p:nvPr/>
-        </p:nvSpPr>
-        <p:spPr>
-          <a:xfrm>
-            <a:off x="6903720" y="3822192"/>
-            <a:ext cx="1783080" cy="822960"/>
-          </a:xfrm>
-          <a:prstGeom prst="rect">
-            <a:avLst/>
-          </a:prstGeom>
-          <a:noFill/>
-          <a:ln/>
-        </p:spPr>
-        <p:txBody>
-          <a:bodyPr wrap="square" rtlCol="0" anchor="ctr"/>
-          <a:lstStyle/>
-          <a:p>
-            <a:pPr algn="ctr" indent="0" marL="0">
-              <a:lnSpc>
-                <a:spcPct val="125000"/>
-              </a:lnSpc>
-              <a:buNone/>
-            </a:pPr>
-            <a:r>
-              <a:rPr lang="en-US" sz="950" dirty="0">
-                <a:solidFill>
-                  <a:srgbClr val="7B9CB8"/>
-                </a:solidFill>
-              </a:rPr>
-              <a:t>Add to your CI/CD pipeline. Trigger automatically at the end of every load test run.</a:t>
+              <a:t>Add to CI/CD. Trigger automatically at the end of every load test run.</a:t>
             </a:r>
             <a:endParaRPr lang="en-US" sz="950" dirty="0"/>
           </a:p>
@@ -3054,7 +3117,7 @@
         <p:spPr>
           <a:xfrm>
             <a:off x="457200" y="256032"/>
-            <a:ext cx="1371600" cy="237744"/>
+            <a:ext cx="1463040" cy="237744"/>
           </a:xfrm>
           <a:prstGeom prst="rect">
             <a:avLst/>
@@ -3079,7 +3142,7 @@
         <p:spPr>
           <a:xfrm>
             <a:off x="457200" y="256032"/>
-            <a:ext cx="1371600" cy="237744"/>
+            <a:ext cx="1463040" cy="237744"/>
           </a:xfrm>
           <a:prstGeom prst="rect">
             <a:avLst/>
@@ -3279,7 +3342,7 @@
                   <a:srgbClr val="FFFFFF"/>
                 </a:solidFill>
               </a:rPr>
-              <a:t>3 Disconnected Sources</a:t>
+              <a:t>4 Disconnected Sources</a:t>
             </a:r>
             <a:endParaRPr lang="en-US" sz="1350" dirty="0"/>
           </a:p>
@@ -3318,7 +3381,7 @@
                   <a:srgbClr val="7B9CB8"/>
                 </a:solidFill>
               </a:rPr>
-              <a:t>.BLG, IIS logs, and LoadRunner outputs live in different formats with no shared schema or timeline.</a:t>
+              <a:t>.BLG, IIS logs, LoadRunner outputs and SQL Server metrics live in different formats with no shared schema or timeline.</a:t>
             </a:r>
             <a:endParaRPr lang="en-US" sz="1100" dirty="0"/>
           </a:p>
@@ -3713,7 +3776,7 @@
         <p:spPr>
           <a:xfrm>
             <a:off x="457200" y="256032"/>
-            <a:ext cx="1371600" cy="237744"/>
+            <a:ext cx="1463040" cy="237744"/>
           </a:xfrm>
           <a:prstGeom prst="rect">
             <a:avLst/>
@@ -3738,7 +3801,7 @@
         <p:spPr>
           <a:xfrm>
             <a:off x="457200" y="256032"/>
-            <a:ext cx="1371600" cy="237744"/>
+            <a:ext cx="1463040" cy="237744"/>
           </a:xfrm>
           <a:prstGeom prst="rect">
             <a:avLst/>
@@ -3951,7 +4014,7 @@
                   <a:srgbClr val="7B9CB8"/>
                 </a:solidFill>
               </a:rPr>
-              <a:t>Auto-detect .BLG IIS LR files</a:t>
+              <a:t>Auto-detect .BLG IIS LR SQL files</a:t>
             </a:r>
             <a:endParaRPr lang="en-US" sz="950" dirty="0"/>
           </a:p>
@@ -4719,7 +4782,7 @@
                   <a:srgbClr val="7B9CB8"/>
                 </a:solidFill>
               </a:rPr>
-              <a:t>HTML + PDF auto-generated</a:t>
+              <a:t>HTML · PDF · Streamlit UI</a:t>
             </a:r>
             <a:endParaRPr lang="en-US" sz="950" dirty="0"/>
           </a:p>
@@ -4913,7 +4976,7 @@
                   <a:srgbClr val="7B9CB8"/>
                 </a:solidFill>
               </a:rPr>
-              <a:t>AI Agents Running in Parallel</a:t>
+              <a:t>AI Agents in Parallel</a:t>
             </a:r>
             <a:endParaRPr lang="en-US" sz="900" dirty="0"/>
           </a:p>
@@ -5154,7 +5217,7 @@
         <p:spPr>
           <a:xfrm>
             <a:off x="457200" y="256032"/>
-            <a:ext cx="1371600" cy="237744"/>
+            <a:ext cx="1463040" cy="237744"/>
           </a:xfrm>
           <a:prstGeom prst="rect">
             <a:avLst/>
@@ -5179,7 +5242,7 @@
         <p:spPr>
           <a:xfrm>
             <a:off x="457200" y="256032"/>
-            <a:ext cx="1371600" cy="237744"/>
+            <a:ext cx="1463040" cy="237744"/>
           </a:xfrm>
           <a:prstGeom prst="rect">
             <a:avLst/>
@@ -5236,7 +5299,7 @@
                   <a:srgbClr val="FFFFFF"/>
                 </a:solidFill>
               </a:rPr>
-              <a:t>Ingests All Your Log Sources — Automatically</a:t>
+              <a:t>Ingests All 4 Log Sources — Automatically</a:t>
             </a:r>
             <a:endParaRPr lang="en-US" sz="2400" dirty="0"/>
           </a:p>
@@ -5250,8 +5313,8 @@
         </p:nvSpPr>
         <p:spPr>
           <a:xfrm>
-            <a:off x="365760" y="1143000"/>
-            <a:ext cx="4023360" cy="1051560"/>
+            <a:off x="320040" y="1143000"/>
+            <a:ext cx="1828800" cy="1298448"/>
           </a:xfrm>
           <a:prstGeom prst="rect">
             <a:avLst/>
@@ -5274,9 +5337,34 @@
           </a:effectLst>
         </p:spPr>
       </p:sp>
+      <p:sp>
+        <p:nvSpPr>
+          <p:cNvPr id="6" name="Shape 4"/>
+          <p:cNvSpPr/>
+          <p:nvPr/>
+        </p:nvSpPr>
+        <p:spPr>
+          <a:xfrm>
+            <a:off x="320040" y="1143000"/>
+            <a:ext cx="1828800" cy="54864"/>
+          </a:xfrm>
+          <a:prstGeom prst="rect">
+            <a:avLst/>
+          </a:prstGeom>
+          <a:solidFill>
+            <a:srgbClr val="1E88E5"/>
+          </a:solidFill>
+          <a:ln w="12700">
+            <a:solidFill>
+              <a:srgbClr val="1E88E5"/>
+            </a:solidFill>
+            <a:prstDash val="solid"/>
+          </a:ln>
+        </p:spPr>
+      </p:sp>
       <p:pic>
         <p:nvPicPr>
-          <p:cNvPr id="6" name="Image 0" descr="preencoded.png">    </p:cNvPr>
+          <p:cNvPr id="7" name="Image 0" descr="preencoded.png">    </p:cNvPr>
           <p:cNvPicPr>
             <a:picLocks noChangeAspect="1"/>
           </p:cNvPicPr>
@@ -5290,8 +5378,8 @@
         </p:blipFill>
         <p:spPr>
           <a:xfrm>
-            <a:off x="502920" y="1417320"/>
-            <a:ext cx="457200" cy="457200"/>
+            <a:off x="411480" y="1252728"/>
+            <a:ext cx="347472" cy="347472"/>
           </a:xfrm>
           <a:prstGeom prst="rect">
             <a:avLst/>
@@ -5300,14 +5388,14 @@
       </p:pic>
       <p:sp>
         <p:nvSpPr>
-          <p:cNvPr id="7" name="Text 4"/>
-          <p:cNvSpPr/>
-          <p:nvPr/>
-        </p:nvSpPr>
-        <p:spPr>
-          <a:xfrm>
-            <a:off x="1051560" y="1216152"/>
-            <a:ext cx="3246120" cy="320040"/>
+          <p:cNvPr id="8" name="Text 5"/>
+          <p:cNvSpPr/>
+          <p:nvPr/>
+        </p:nvSpPr>
+        <p:spPr>
+          <a:xfrm>
+            <a:off x="822960" y="1234440"/>
+            <a:ext cx="1280160" cy="320040"/>
           </a:xfrm>
           <a:prstGeom prst="rect">
             <a:avLst/>
@@ -5323,27 +5411,27 @@
               <a:buNone/>
             </a:pPr>
             <a:r>
-              <a:rPr lang="en-US" sz="1300" b="1" dirty="0">
+              <a:rPr lang="en-US" sz="1050" b="1" dirty="0">
                 <a:solidFill>
                   <a:srgbClr val="FFFFFF"/>
                 </a:solidFill>
               </a:rPr>
-              <a:t>.BLG  –  Windows PerfMon</a:t>
-            </a:r>
-            <a:endParaRPr lang="en-US" sz="1300" dirty="0"/>
-          </a:p>
-        </p:txBody>
-      </p:sp>
-      <p:sp>
-        <p:nvSpPr>
-          <p:cNvPr id="8" name="Text 5"/>
-          <p:cNvSpPr/>
-          <p:nvPr/>
-        </p:nvSpPr>
-        <p:spPr>
-          <a:xfrm>
-            <a:off x="1051560" y="1490472"/>
-            <a:ext cx="3246120" cy="237744"/>
+              <a:t>.BLG — PerfMon</a:t>
+            </a:r>
+            <a:endParaRPr lang="en-US" sz="1050" dirty="0"/>
+          </a:p>
+        </p:txBody>
+      </p:sp>
+      <p:sp>
+        <p:nvSpPr>
+          <p:cNvPr id="9" name="Text 6"/>
+          <p:cNvSpPr/>
+          <p:nvPr/>
+        </p:nvSpPr>
+        <p:spPr>
+          <a:xfrm>
+            <a:off x="393192" y="1655064"/>
+            <a:ext cx="1691640" cy="329184"/>
           </a:xfrm>
           <a:prstGeom prst="rect">
             <a:avLst/>
@@ -5359,27 +5447,27 @@
               <a:buNone/>
             </a:pPr>
             <a:r>
-              <a:rPr lang="en-US" sz="950" dirty="0">
+              <a:rPr lang="en-US" sz="850" dirty="0">
                 <a:solidFill>
                   <a:srgbClr val="7B9CB8"/>
                 </a:solidFill>
               </a:rPr>
               <a:t>›  CPU, Memory, Disk I/O, Network</a:t>
             </a:r>
-            <a:endParaRPr lang="en-US" sz="950" dirty="0"/>
-          </a:p>
-        </p:txBody>
-      </p:sp>
-      <p:sp>
-        <p:nvSpPr>
-          <p:cNvPr id="9" name="Text 6"/>
-          <p:cNvSpPr/>
-          <p:nvPr/>
-        </p:nvSpPr>
-        <p:spPr>
-          <a:xfrm>
-            <a:off x="1051560" y="1719072"/>
-            <a:ext cx="3246120" cy="237744"/>
+            <a:endParaRPr lang="en-US" sz="850" dirty="0"/>
+          </a:p>
+        </p:txBody>
+      </p:sp>
+      <p:sp>
+        <p:nvSpPr>
+          <p:cNvPr id="10" name="Text 7"/>
+          <p:cNvSpPr/>
+          <p:nvPr/>
+        </p:nvSpPr>
+        <p:spPr>
+          <a:xfrm>
+            <a:off x="393192" y="2002536"/>
+            <a:ext cx="1691640" cy="329184"/>
           </a:xfrm>
           <a:prstGeom prst="rect">
             <a:avLst/>
@@ -5395,50 +5483,14 @@
               <a:buNone/>
             </a:pPr>
             <a:r>
-              <a:rPr lang="en-US" sz="950" dirty="0">
+              <a:rPr lang="en-US" sz="850" dirty="0">
                 <a:solidFill>
                   <a:srgbClr val="7B9CB8"/>
                 </a:solidFill>
               </a:rPr>
               <a:t>›  Process handles &amp; working set</a:t>
             </a:r>
-            <a:endParaRPr lang="en-US" sz="950" dirty="0"/>
-          </a:p>
-        </p:txBody>
-      </p:sp>
-      <p:sp>
-        <p:nvSpPr>
-          <p:cNvPr id="10" name="Text 7"/>
-          <p:cNvSpPr/>
-          <p:nvPr/>
-        </p:nvSpPr>
-        <p:spPr>
-          <a:xfrm>
-            <a:off x="1051560" y="1947672"/>
-            <a:ext cx="3246120" cy="237744"/>
-          </a:xfrm>
-          <a:prstGeom prst="rect">
-            <a:avLst/>
-          </a:prstGeom>
-          <a:noFill/>
-          <a:ln/>
-        </p:spPr>
-        <p:txBody>
-          <a:bodyPr wrap="square" rtlCol="0" anchor="ctr"/>
-          <a:lstStyle/>
-          <a:p>
-            <a:pPr indent="0" marL="0">
-              <a:buNone/>
-            </a:pPr>
-            <a:r>
-              <a:rPr lang="en-US" sz="950" dirty="0">
-                <a:solidFill>
-                  <a:srgbClr val="7B9CB8"/>
-                </a:solidFill>
-              </a:rPr>
-              <a:t>›  Converted via relog → parsed automatically</a:t>
-            </a:r>
-            <a:endParaRPr lang="en-US" sz="950" dirty="0"/>
+            <a:endParaRPr lang="en-US" sz="850" dirty="0"/>
           </a:p>
         </p:txBody>
       </p:sp>
@@ -5450,8 +5502,8 @@
         </p:nvSpPr>
         <p:spPr>
           <a:xfrm>
-            <a:off x="365760" y="2331720"/>
-            <a:ext cx="4023360" cy="1051560"/>
+            <a:off x="2331720" y="1143000"/>
+            <a:ext cx="1828800" cy="1298448"/>
           </a:xfrm>
           <a:prstGeom prst="rect">
             <a:avLst/>
@@ -5474,9 +5526,34 @@
           </a:effectLst>
         </p:spPr>
       </p:sp>
+      <p:sp>
+        <p:nvSpPr>
+          <p:cNvPr id="12" name="Shape 9"/>
+          <p:cNvSpPr/>
+          <p:nvPr/>
+        </p:nvSpPr>
+        <p:spPr>
+          <a:xfrm>
+            <a:off x="2331720" y="1143000"/>
+            <a:ext cx="1828800" cy="54864"/>
+          </a:xfrm>
+          <a:prstGeom prst="rect">
+            <a:avLst/>
+          </a:prstGeom>
+          <a:solidFill>
+            <a:srgbClr val="00BCD4"/>
+          </a:solidFill>
+          <a:ln w="12700">
+            <a:solidFill>
+              <a:srgbClr val="00BCD4"/>
+            </a:solidFill>
+            <a:prstDash val="solid"/>
+          </a:ln>
+        </p:spPr>
+      </p:sp>
       <p:pic>
         <p:nvPicPr>
-          <p:cNvPr id="12" name="Image 1" descr="preencoded.png">    </p:cNvPr>
+          <p:cNvPr id="13" name="Image 1" descr="preencoded.png">    </p:cNvPr>
           <p:cNvPicPr>
             <a:picLocks noChangeAspect="1"/>
           </p:cNvPicPr>
@@ -5490,8 +5567,8 @@
         </p:blipFill>
         <p:spPr>
           <a:xfrm>
-            <a:off x="502920" y="2606040"/>
-            <a:ext cx="457200" cy="457200"/>
+            <a:off x="2423160" y="1252728"/>
+            <a:ext cx="347472" cy="347472"/>
           </a:xfrm>
           <a:prstGeom prst="rect">
             <a:avLst/>
@@ -5500,14 +5577,14 @@
       </p:pic>
       <p:sp>
         <p:nvSpPr>
-          <p:cNvPr id="13" name="Text 9"/>
-          <p:cNvSpPr/>
-          <p:nvPr/>
-        </p:nvSpPr>
-        <p:spPr>
-          <a:xfrm>
-            <a:off x="1051560" y="2404872"/>
-            <a:ext cx="3246120" cy="320040"/>
+          <p:cNvPr id="14" name="Text 10"/>
+          <p:cNvSpPr/>
+          <p:nvPr/>
+        </p:nvSpPr>
+        <p:spPr>
+          <a:xfrm>
+            <a:off x="2834640" y="1234440"/>
+            <a:ext cx="1280160" cy="320040"/>
           </a:xfrm>
           <a:prstGeom prst="rect">
             <a:avLst/>
@@ -5523,27 +5600,27 @@
               <a:buNone/>
             </a:pPr>
             <a:r>
-              <a:rPr lang="en-US" sz="1300" b="1" dirty="0">
+              <a:rPr lang="en-US" sz="1050" b="1" dirty="0">
                 <a:solidFill>
                   <a:srgbClr val="FFFFFF"/>
                 </a:solidFill>
               </a:rPr>
-              <a:t>IIS Logs  –  W3C Format</a:t>
-            </a:r>
-            <a:endParaRPr lang="en-US" sz="1300" dirty="0"/>
-          </a:p>
-        </p:txBody>
-      </p:sp>
-      <p:sp>
-        <p:nvSpPr>
-          <p:cNvPr id="14" name="Text 10"/>
-          <p:cNvSpPr/>
-          <p:nvPr/>
-        </p:nvSpPr>
-        <p:spPr>
-          <a:xfrm>
-            <a:off x="1051560" y="2679192"/>
-            <a:ext cx="3246120" cy="237744"/>
+              <a:t>IIS Logs — W3C</a:t>
+            </a:r>
+            <a:endParaRPr lang="en-US" sz="1050" dirty="0"/>
+          </a:p>
+        </p:txBody>
+      </p:sp>
+      <p:sp>
+        <p:nvSpPr>
+          <p:cNvPr id="15" name="Text 11"/>
+          <p:cNvSpPr/>
+          <p:nvPr/>
+        </p:nvSpPr>
+        <p:spPr>
+          <a:xfrm>
+            <a:off x="2404872" y="1655064"/>
+            <a:ext cx="1691640" cy="329184"/>
           </a:xfrm>
           <a:prstGeom prst="rect">
             <a:avLst/>
@@ -5559,27 +5636,27 @@
               <a:buNone/>
             </a:pPr>
             <a:r>
-              <a:rPr lang="en-US" sz="950" dirty="0">
+              <a:rPr lang="en-US" sz="850" dirty="0">
                 <a:solidFill>
                   <a:srgbClr val="7B9CB8"/>
                 </a:solidFill>
               </a:rPr>
-              <a:t>›  Request latency &amp; HTTP status codes</a:t>
-            </a:r>
-            <a:endParaRPr lang="en-US" sz="950" dirty="0"/>
-          </a:p>
-        </p:txBody>
-      </p:sp>
-      <p:sp>
-        <p:nvSpPr>
-          <p:cNvPr id="15" name="Text 11"/>
-          <p:cNvSpPr/>
-          <p:nvPr/>
-        </p:nvSpPr>
-        <p:spPr>
-          <a:xfrm>
-            <a:off x="1051560" y="2907792"/>
-            <a:ext cx="3246120" cy="237744"/>
+              <a:t>›  Request latency &amp; HTTP status</a:t>
+            </a:r>
+            <a:endParaRPr lang="en-US" sz="850" dirty="0"/>
+          </a:p>
+        </p:txBody>
+      </p:sp>
+      <p:sp>
+        <p:nvSpPr>
+          <p:cNvPr id="16" name="Text 12"/>
+          <p:cNvSpPr/>
+          <p:nvPr/>
+        </p:nvSpPr>
+        <p:spPr>
+          <a:xfrm>
+            <a:off x="2404872" y="2002536"/>
+            <a:ext cx="1691640" cy="329184"/>
           </a:xfrm>
           <a:prstGeom prst="rect">
             <a:avLst/>
@@ -5595,50 +5672,14 @@
               <a:buNone/>
             </a:pPr>
             <a:r>
-              <a:rPr lang="en-US" sz="950" dirty="0">
+              <a:rPr lang="en-US" sz="850" dirty="0">
                 <a:solidFill>
                   <a:srgbClr val="7B9CB8"/>
                 </a:solidFill>
               </a:rPr>
-              <a:t>›  URI stems, bytes sent, time-taken field</a:t>
-            </a:r>
-            <a:endParaRPr lang="en-US" sz="950" dirty="0"/>
-          </a:p>
-        </p:txBody>
-      </p:sp>
-      <p:sp>
-        <p:nvSpPr>
-          <p:cNvPr id="16" name="Text 12"/>
-          <p:cNvSpPr/>
-          <p:nvPr/>
-        </p:nvSpPr>
-        <p:spPr>
-          <a:xfrm>
-            <a:off x="1051560" y="3136392"/>
-            <a:ext cx="3246120" cy="237744"/>
-          </a:xfrm>
-          <a:prstGeom prst="rect">
-            <a:avLst/>
-          </a:prstGeom>
-          <a:noFill/>
-          <a:ln/>
-        </p:spPr>
-        <p:txBody>
-          <a:bodyPr wrap="square" rtlCol="0" anchor="ctr"/>
-          <a:lstStyle/>
-          <a:p>
-            <a:pPr indent="0" marL="0">
-              <a:buNone/>
-            </a:pPr>
-            <a:r>
-              <a:rPr lang="en-US" sz="950" dirty="0">
-                <a:solidFill>
-                  <a:srgbClr val="7B9CB8"/>
-                </a:solidFill>
-              </a:rPr>
-              <a:t>›  Parses variable #Fields header automatically</a:t>
-            </a:r>
-            <a:endParaRPr lang="en-US" sz="950" dirty="0"/>
+              <a:t>›  URI stems, bytes, time-taken</a:t>
+            </a:r>
+            <a:endParaRPr lang="en-US" sz="850" dirty="0"/>
           </a:p>
         </p:txBody>
       </p:sp>
@@ -5650,8 +5691,8 @@
         </p:nvSpPr>
         <p:spPr>
           <a:xfrm>
-            <a:off x="365760" y="3520440"/>
-            <a:ext cx="4023360" cy="1051560"/>
+            <a:off x="320040" y="2606040"/>
+            <a:ext cx="1828800" cy="1298448"/>
           </a:xfrm>
           <a:prstGeom prst="rect">
             <a:avLst/>
@@ -5674,9 +5715,34 @@
           </a:effectLst>
         </p:spPr>
       </p:sp>
+      <p:sp>
+        <p:nvSpPr>
+          <p:cNvPr id="18" name="Shape 14"/>
+          <p:cNvSpPr/>
+          <p:nvPr/>
+        </p:nvSpPr>
+        <p:spPr>
+          <a:xfrm>
+            <a:off x="320040" y="2606040"/>
+            <a:ext cx="1828800" cy="54864"/>
+          </a:xfrm>
+          <a:prstGeom prst="rect">
+            <a:avLst/>
+          </a:prstGeom>
+          <a:solidFill>
+            <a:srgbClr val="00C9A7"/>
+          </a:solidFill>
+          <a:ln w="12700">
+            <a:solidFill>
+              <a:srgbClr val="00C9A7"/>
+            </a:solidFill>
+            <a:prstDash val="solid"/>
+          </a:ln>
+        </p:spPr>
+      </p:sp>
       <p:pic>
         <p:nvPicPr>
-          <p:cNvPr id="18" name="Image 2" descr="preencoded.png">    </p:cNvPr>
+          <p:cNvPr id="19" name="Image 2" descr="preencoded.png">    </p:cNvPr>
           <p:cNvPicPr>
             <a:picLocks noChangeAspect="1"/>
           </p:cNvPicPr>
@@ -5690,8 +5756,8 @@
         </p:blipFill>
         <p:spPr>
           <a:xfrm>
-            <a:off x="502920" y="3794760"/>
-            <a:ext cx="457200" cy="457200"/>
+            <a:off x="411480" y="2715768"/>
+            <a:ext cx="347472" cy="347472"/>
           </a:xfrm>
           <a:prstGeom prst="rect">
             <a:avLst/>
@@ -5700,14 +5766,14 @@
       </p:pic>
       <p:sp>
         <p:nvSpPr>
-          <p:cNvPr id="19" name="Text 14"/>
-          <p:cNvSpPr/>
-          <p:nvPr/>
-        </p:nvSpPr>
-        <p:spPr>
-          <a:xfrm>
-            <a:off x="1051560" y="3593592"/>
-            <a:ext cx="3246120" cy="320040"/>
+          <p:cNvPr id="20" name="Text 15"/>
+          <p:cNvSpPr/>
+          <p:nvPr/>
+        </p:nvSpPr>
+        <p:spPr>
+          <a:xfrm>
+            <a:off x="822960" y="2697480"/>
+            <a:ext cx="1280160" cy="320040"/>
           </a:xfrm>
           <a:prstGeom prst="rect">
             <a:avLst/>
@@ -5723,27 +5789,27 @@
               <a:buNone/>
             </a:pPr>
             <a:r>
-              <a:rPr lang="en-US" sz="1300" b="1" dirty="0">
+              <a:rPr lang="en-US" sz="1050" b="1" dirty="0">
                 <a:solidFill>
                   <a:srgbClr val="FFFFFF"/>
                 </a:solidFill>
               </a:rPr>
-              <a:t>LoadRunner  –  Results &amp; Vlogs</a:t>
-            </a:r>
-            <a:endParaRPr lang="en-US" sz="1300" dirty="0"/>
-          </a:p>
-        </p:txBody>
-      </p:sp>
-      <p:sp>
-        <p:nvSpPr>
-          <p:cNvPr id="20" name="Text 15"/>
-          <p:cNvSpPr/>
-          <p:nvPr/>
-        </p:nvSpPr>
-        <p:spPr>
-          <a:xfrm>
-            <a:off x="1051560" y="3867912"/>
-            <a:ext cx="3246120" cy="237744"/>
+              <a:t>LoadRunner</a:t>
+            </a:r>
+            <a:endParaRPr lang="en-US" sz="1050" dirty="0"/>
+          </a:p>
+        </p:txBody>
+      </p:sp>
+      <p:sp>
+        <p:nvSpPr>
+          <p:cNvPr id="21" name="Text 16"/>
+          <p:cNvSpPr/>
+          <p:nvPr/>
+        </p:nvSpPr>
+        <p:spPr>
+          <a:xfrm>
+            <a:off x="393192" y="3118104"/>
+            <a:ext cx="1691640" cy="329184"/>
           </a:xfrm>
           <a:prstGeom prst="rect">
             <a:avLst/>
@@ -5759,27 +5825,27 @@
               <a:buNone/>
             </a:pPr>
             <a:r>
-              <a:rPr lang="en-US" sz="950" dirty="0">
+              <a:rPr lang="en-US" sz="850" dirty="0">
                 <a:solidFill>
                   <a:srgbClr val="7B9CB8"/>
                 </a:solidFill>
               </a:rPr>
-              <a:t>›  Transaction p50/p90/p95 response times</a:t>
-            </a:r>
-            <a:endParaRPr lang="en-US" sz="950" dirty="0"/>
-          </a:p>
-        </p:txBody>
-      </p:sp>
-      <p:sp>
-        <p:nvSpPr>
-          <p:cNvPr id="21" name="Text 16"/>
-          <p:cNvSpPr/>
-          <p:nvPr/>
-        </p:nvSpPr>
-        <p:spPr>
-          <a:xfrm>
-            <a:off x="1051560" y="4096512"/>
-            <a:ext cx="3246120" cy="237744"/>
+              <a:t>›  p50/p90/p95 response times</a:t>
+            </a:r>
+            <a:endParaRPr lang="en-US" sz="850" dirty="0"/>
+          </a:p>
+        </p:txBody>
+      </p:sp>
+      <p:sp>
+        <p:nvSpPr>
+          <p:cNvPr id="22" name="Text 17"/>
+          <p:cNvSpPr/>
+          <p:nvPr/>
+        </p:nvSpPr>
+        <p:spPr>
+          <a:xfrm>
+            <a:off x="393192" y="3465576"/>
+            <a:ext cx="1691640" cy="329184"/>
           </a:xfrm>
           <a:prstGeom prst="rect">
             <a:avLst/>
@@ -5795,27 +5861,108 @@
               <a:buNone/>
             </a:pPr>
             <a:r>
-              <a:rPr lang="en-US" sz="950" dirty="0">
+              <a:rPr lang="en-US" sz="850" dirty="0">
                 <a:solidFill>
                   <a:srgbClr val="7B9CB8"/>
                 </a:solidFill>
               </a:rPr>
-              <a:t>›  Vuser error logs &amp; SLA breach events</a:t>
-            </a:r>
-            <a:endParaRPr lang="en-US" sz="950" dirty="0"/>
-          </a:p>
-        </p:txBody>
-      </p:sp>
-      <p:sp>
-        <p:nvSpPr>
-          <p:cNvPr id="22" name="Text 17"/>
-          <p:cNvSpPr/>
-          <p:nvPr/>
-        </p:nvSpPr>
-        <p:spPr>
-          <a:xfrm>
-            <a:off x="1051560" y="4325112"/>
-            <a:ext cx="3246120" cy="237744"/>
+              <a:t>›  Vuser error logs + results CSV</a:t>
+            </a:r>
+            <a:endParaRPr lang="en-US" sz="850" dirty="0"/>
+          </a:p>
+        </p:txBody>
+      </p:sp>
+      <p:sp>
+        <p:nvSpPr>
+          <p:cNvPr id="23" name="Shape 18"/>
+          <p:cNvSpPr/>
+          <p:nvPr/>
+        </p:nvSpPr>
+        <p:spPr>
+          <a:xfrm>
+            <a:off x="2331720" y="2606040"/>
+            <a:ext cx="1828800" cy="1298448"/>
+          </a:xfrm>
+          <a:prstGeom prst="rect">
+            <a:avLst/>
+          </a:prstGeom>
+          <a:solidFill>
+            <a:srgbClr val="0D2137"/>
+          </a:solidFill>
+          <a:ln w="25400">
+            <a:solidFill>
+              <a:srgbClr val="43A047"/>
+            </a:solidFill>
+            <a:prstDash val="solid"/>
+          </a:ln>
+          <a:effectLst>
+            <a:outerShdw sx="100000" sy="100000" kx="0" ky="0" algn="bl" rotWithShape="0" blurRad="101600" dist="38100" dir="8100000">
+              <a:srgbClr val="000000">
+                <a:alpha val="18000"/>
+              </a:srgbClr>
+            </a:outerShdw>
+          </a:effectLst>
+        </p:spPr>
+      </p:sp>
+      <p:sp>
+        <p:nvSpPr>
+          <p:cNvPr id="24" name="Shape 19"/>
+          <p:cNvSpPr/>
+          <p:nvPr/>
+        </p:nvSpPr>
+        <p:spPr>
+          <a:xfrm>
+            <a:off x="2331720" y="2606040"/>
+            <a:ext cx="1828800" cy="54864"/>
+          </a:xfrm>
+          <a:prstGeom prst="rect">
+            <a:avLst/>
+          </a:prstGeom>
+          <a:solidFill>
+            <a:srgbClr val="43A047"/>
+          </a:solidFill>
+          <a:ln w="12700">
+            <a:solidFill>
+              <a:srgbClr val="43A047"/>
+            </a:solidFill>
+            <a:prstDash val="solid"/>
+          </a:ln>
+        </p:spPr>
+      </p:sp>
+      <p:pic>
+        <p:nvPicPr>
+          <p:cNvPr id="25" name="Image 3" descr="preencoded.png">    </p:cNvPr>
+          <p:cNvPicPr>
+            <a:picLocks noChangeAspect="1"/>
+          </p:cNvPicPr>
+          <p:nvPr/>
+        </p:nvPicPr>
+        <p:blipFill>
+          <a:blip r:embed="rId4"/>
+          <a:stretch>
+            <a:fillRect/>
+          </a:stretch>
+        </p:blipFill>
+        <p:spPr>
+          <a:xfrm>
+            <a:off x="2423160" y="2715768"/>
+            <a:ext cx="347472" cy="347472"/>
+          </a:xfrm>
+          <a:prstGeom prst="rect">
+            <a:avLst/>
+          </a:prstGeom>
+        </p:spPr>
+      </p:pic>
+      <p:sp>
+        <p:nvSpPr>
+          <p:cNvPr id="26" name="Text 20"/>
+          <p:cNvSpPr/>
+          <p:nvPr/>
+        </p:nvSpPr>
+        <p:spPr>
+          <a:xfrm>
+            <a:off x="2834640" y="2697480"/>
+            <a:ext cx="1280160" cy="320040"/>
           </a:xfrm>
           <a:prstGeom prst="rect">
             <a:avLst/>
@@ -5831,27 +5978,162 @@
               <a:buNone/>
             </a:pPr>
             <a:r>
-              <a:rPr lang="en-US" sz="950" dirty="0">
+              <a:rPr lang="en-US" sz="1050" b="1" dirty="0">
+                <a:solidFill>
+                  <a:srgbClr val="FFFFFF"/>
+                </a:solidFill>
+              </a:rPr>
+              <a:t>SQL Server — PerfMon</a:t>
+            </a:r>
+            <a:endParaRPr lang="en-US" sz="1050" dirty="0"/>
+          </a:p>
+        </p:txBody>
+      </p:sp>
+      <p:sp>
+        <p:nvSpPr>
+          <p:cNvPr id="27" name="Text 21"/>
+          <p:cNvSpPr/>
+          <p:nvPr/>
+        </p:nvSpPr>
+        <p:spPr>
+          <a:xfrm>
+            <a:off x="2404872" y="3118104"/>
+            <a:ext cx="1691640" cy="329184"/>
+          </a:xfrm>
+          <a:prstGeom prst="rect">
+            <a:avLst/>
+          </a:prstGeom>
+          <a:noFill/>
+          <a:ln/>
+        </p:spPr>
+        <p:txBody>
+          <a:bodyPr wrap="square" rtlCol="0" anchor="ctr"/>
+          <a:lstStyle/>
+          <a:p>
+            <a:pPr indent="0" marL="0">
+              <a:buNone/>
+            </a:pPr>
+            <a:r>
+              <a:rPr lang="en-US" sz="850" dirty="0">
                 <a:solidFill>
                   <a:srgbClr val="7B9CB8"/>
                 </a:solidFill>
               </a:rPr>
-              <a:t>›  Results CSV + vuser*.log both supported</a:t>
-            </a:r>
-            <a:endParaRPr lang="en-US" sz="950" dirty="0"/>
-          </a:p>
-        </p:txBody>
-      </p:sp>
-      <p:sp>
-        <p:nvSpPr>
-          <p:cNvPr id="23" name="Shape 18"/>
-          <p:cNvSpPr/>
-          <p:nvPr/>
-        </p:nvSpPr>
-        <p:spPr>
-          <a:xfrm>
-            <a:off x="4663440" y="1143000"/>
-            <a:ext cx="4114800" cy="3383280"/>
+              <a:t>›  Buffer cache, PLE, deadlocks</a:t>
+            </a:r>
+            <a:endParaRPr lang="en-US" sz="850" dirty="0"/>
+          </a:p>
+        </p:txBody>
+      </p:sp>
+      <p:sp>
+        <p:nvSpPr>
+          <p:cNvPr id="28" name="Text 22"/>
+          <p:cNvSpPr/>
+          <p:nvPr/>
+        </p:nvSpPr>
+        <p:spPr>
+          <a:xfrm>
+            <a:off x="2404872" y="3465576"/>
+            <a:ext cx="1691640" cy="329184"/>
+          </a:xfrm>
+          <a:prstGeom prst="rect">
+            <a:avLst/>
+          </a:prstGeom>
+          <a:noFill/>
+          <a:ln/>
+        </p:spPr>
+        <p:txBody>
+          <a:bodyPr wrap="square" rtlCol="0" anchor="ctr"/>
+          <a:lstStyle/>
+          <a:p>
+            <a:pPr indent="0" marL="0">
+              <a:buNone/>
+            </a:pPr>
+            <a:r>
+              <a:rPr lang="en-US" sz="850" dirty="0">
+                <a:solidFill>
+                  <a:srgbClr val="7B9CB8"/>
+                </a:solidFill>
+              </a:rPr>
+              <a:t>›  Batch req, lock waits, blocked procs</a:t>
+            </a:r>
+            <a:endParaRPr lang="en-US" sz="850" dirty="0"/>
+          </a:p>
+        </p:txBody>
+      </p:sp>
+      <p:sp>
+        <p:nvSpPr>
+          <p:cNvPr id="29" name="Shape 23"/>
+          <p:cNvSpPr/>
+          <p:nvPr/>
+        </p:nvSpPr>
+        <p:spPr>
+          <a:xfrm>
+            <a:off x="2331720" y="4005072"/>
+            <a:ext cx="1828800" cy="256032"/>
+          </a:xfrm>
+          <a:prstGeom prst="rect">
+            <a:avLst/>
+          </a:prstGeom>
+          <a:solidFill>
+            <a:srgbClr val="43A047">
+              <a:alpha val="80000"/>
+            </a:srgbClr>
+          </a:solidFill>
+          <a:ln w="12700">
+            <a:solidFill>
+              <a:srgbClr val="43A047"/>
+            </a:solidFill>
+            <a:prstDash val="solid"/>
+          </a:ln>
+        </p:spPr>
+      </p:sp>
+      <p:sp>
+        <p:nvSpPr>
+          <p:cNvPr id="30" name="Text 24"/>
+          <p:cNvSpPr/>
+          <p:nvPr/>
+        </p:nvSpPr>
+        <p:spPr>
+          <a:xfrm>
+            <a:off x="2331720" y="4005072"/>
+            <a:ext cx="1828800" cy="256032"/>
+          </a:xfrm>
+          <a:prstGeom prst="rect">
+            <a:avLst/>
+          </a:prstGeom>
+          <a:noFill/>
+          <a:ln/>
+        </p:spPr>
+        <p:txBody>
+          <a:bodyPr wrap="square" lIns="0" tIns="0" rIns="0" bIns="0" rtlCol="0" anchor="ctr"/>
+          <a:lstStyle/>
+          <a:p>
+            <a:pPr algn="ctr" indent="0" marL="0">
+              <a:buNone/>
+            </a:pPr>
+            <a:r>
+              <a:rPr lang="en-US" sz="800" b="1" dirty="0">
+                <a:solidFill>
+                  <a:srgbClr val="FFFFFF"/>
+                </a:solidFill>
+              </a:rPr>
+              <a:t>NEW — SQL Server Support</a:t>
+            </a:r>
+            <a:endParaRPr lang="en-US" sz="800" dirty="0"/>
+          </a:p>
+        </p:txBody>
+      </p:sp>
+      <p:sp>
+        <p:nvSpPr>
+          <p:cNvPr id="31" name="Shape 25"/>
+          <p:cNvSpPr/>
+          <p:nvPr/>
+        </p:nvSpPr>
+        <p:spPr>
+          <a:xfrm>
+            <a:off x="4343400" y="1143000"/>
+            <a:ext cx="4434840" cy="3566160"/>
           </a:xfrm>
           <a:prstGeom prst="rect">
             <a:avLst/>
@@ -5876,14 +6158,14 @@
       </p:sp>
       <p:sp>
         <p:nvSpPr>
-          <p:cNvPr id="24" name="Shape 19"/>
-          <p:cNvSpPr/>
-          <p:nvPr/>
-        </p:nvSpPr>
-        <p:spPr>
-          <a:xfrm>
-            <a:off x="4663440" y="1143000"/>
-            <a:ext cx="4114800" cy="54864"/>
+          <p:cNvPr id="32" name="Shape 26"/>
+          <p:cNvSpPr/>
+          <p:nvPr/>
+        </p:nvSpPr>
+        <p:spPr>
+          <a:xfrm>
+            <a:off x="4343400" y="1143000"/>
+            <a:ext cx="4434840" cy="54864"/>
           </a:xfrm>
           <a:prstGeom prst="rect">
             <a:avLst/>
@@ -5901,14 +6183,14 @@
       </p:sp>
       <p:sp>
         <p:nvSpPr>
-          <p:cNvPr id="25" name="Text 20"/>
-          <p:cNvSpPr/>
-          <p:nvPr/>
-        </p:nvSpPr>
-        <p:spPr>
-          <a:xfrm>
-            <a:off x="4754880" y="1234440"/>
-            <a:ext cx="3931920" cy="347472"/>
+          <p:cNvPr id="33" name="Text 27"/>
+          <p:cNvSpPr/>
+          <p:nvPr/>
+        </p:nvSpPr>
+        <p:spPr>
+          <a:xfrm>
+            <a:off x="4480560" y="1234440"/>
+            <a:ext cx="4206240" cy="347472"/>
           </a:xfrm>
           <a:prstGeom prst="rect">
             <a:avLst/>
@@ -5937,13 +6219,13 @@
       </p:sp>
       <p:sp>
         <p:nvSpPr>
-          <p:cNvPr id="26" name="Shape 21"/>
-          <p:cNvSpPr/>
-          <p:nvPr/>
-        </p:nvSpPr>
-        <p:spPr>
-          <a:xfrm>
-            <a:off x="4754880" y="1764792"/>
+          <p:cNvPr id="34" name="Shape 28"/>
+          <p:cNvSpPr/>
+          <p:nvPr/>
+        </p:nvSpPr>
+        <p:spPr>
+          <a:xfrm>
+            <a:off x="4480560" y="1764792"/>
             <a:ext cx="201168" cy="201168"/>
           </a:xfrm>
           <a:prstGeom prst="oval">
@@ -5962,14 +6244,14 @@
       </p:sp>
       <p:sp>
         <p:nvSpPr>
-          <p:cNvPr id="27" name="Text 22"/>
-          <p:cNvSpPr/>
-          <p:nvPr/>
-        </p:nvSpPr>
-        <p:spPr>
-          <a:xfrm>
-            <a:off x="5047488" y="1691640"/>
-            <a:ext cx="3566160" cy="274320"/>
+          <p:cNvPr id="35" name="Text 29"/>
+          <p:cNvSpPr/>
+          <p:nvPr/>
+        </p:nvSpPr>
+        <p:spPr>
+          <a:xfrm>
+            <a:off x="4773168" y="1691640"/>
+            <a:ext cx="3840480" cy="274320"/>
           </a:xfrm>
           <a:prstGeom prst="rect">
             <a:avLst/>
@@ -5998,14 +6280,14 @@
       </p:sp>
       <p:sp>
         <p:nvSpPr>
-          <p:cNvPr id="28" name="Text 23"/>
-          <p:cNvSpPr/>
-          <p:nvPr/>
-        </p:nvSpPr>
-        <p:spPr>
-          <a:xfrm>
-            <a:off x="5047488" y="1947672"/>
-            <a:ext cx="3566160" cy="256032"/>
+          <p:cNvPr id="36" name="Text 30"/>
+          <p:cNvSpPr/>
+          <p:nvPr/>
+        </p:nvSpPr>
+        <p:spPr>
+          <a:xfrm>
+            <a:off x="4773168" y="1947672"/>
+            <a:ext cx="3840480" cy="256032"/>
           </a:xfrm>
           <a:prstGeom prst="rect">
             <a:avLst/>
@@ -6026,7 +6308,7 @@
                   <a:srgbClr val="7B9CB8"/>
                 </a:solidFill>
               </a:rPr>
-              <a:t>All 3 sources → {timestamp, source, metric, value, severity}</a:t>
+              <a:t>All 4 sources → {timestamp, source, metric, value, severity}</a:t>
             </a:r>
             <a:endParaRPr lang="en-US" sz="950" dirty="0"/>
           </a:p>
@@ -6034,13 +6316,13 @@
       </p:sp>
       <p:sp>
         <p:nvSpPr>
-          <p:cNvPr id="29" name="Shape 24"/>
-          <p:cNvSpPr/>
-          <p:nvPr/>
-        </p:nvSpPr>
-        <p:spPr>
-          <a:xfrm>
-            <a:off x="4754880" y="2313432"/>
+          <p:cNvPr id="37" name="Shape 31"/>
+          <p:cNvSpPr/>
+          <p:nvPr/>
+        </p:nvSpPr>
+        <p:spPr>
+          <a:xfrm>
+            <a:off x="4480560" y="2313432"/>
             <a:ext cx="201168" cy="201168"/>
           </a:xfrm>
           <a:prstGeom prst="oval">
@@ -6059,14 +6341,14 @@
       </p:sp>
       <p:sp>
         <p:nvSpPr>
-          <p:cNvPr id="30" name="Text 25"/>
-          <p:cNvSpPr/>
-          <p:nvPr/>
-        </p:nvSpPr>
-        <p:spPr>
-          <a:xfrm>
-            <a:off x="5047488" y="2240280"/>
-            <a:ext cx="3566160" cy="274320"/>
+          <p:cNvPr id="38" name="Text 32"/>
+          <p:cNvSpPr/>
+          <p:nvPr/>
+        </p:nvSpPr>
+        <p:spPr>
+          <a:xfrm>
+            <a:off x="4773168" y="2240280"/>
+            <a:ext cx="3840480" cy="274320"/>
           </a:xfrm>
           <a:prstGeom prst="rect">
             <a:avLst/>
@@ -6095,14 +6377,14 @@
       </p:sp>
       <p:sp>
         <p:nvSpPr>
-          <p:cNvPr id="31" name="Text 26"/>
-          <p:cNvSpPr/>
-          <p:nvPr/>
-        </p:nvSpPr>
-        <p:spPr>
-          <a:xfrm>
-            <a:off x="5047488" y="2496312"/>
-            <a:ext cx="3566160" cy="256032"/>
+          <p:cNvPr id="39" name="Text 33"/>
+          <p:cNvSpPr/>
+          <p:nvPr/>
+        </p:nvSpPr>
+        <p:spPr>
+          <a:xfrm>
+            <a:off x="4773168" y="2496312"/>
+            <a:ext cx="3840480" cy="256032"/>
           </a:xfrm>
           <a:prstGeom prst="rect">
             <a:avLst/>
@@ -6123,7 +6405,7 @@
                   <a:srgbClr val="7B9CB8"/>
                 </a:solidFill>
               </a:rPr>
-              <a:t>Eliminates timezone drift across log sources</a:t>
+              <a:t>Eliminates timezone drift across all log sources</a:t>
             </a:r>
             <a:endParaRPr lang="en-US" sz="950" dirty="0"/>
           </a:p>
@@ -6131,13 +6413,13 @@
       </p:sp>
       <p:sp>
         <p:nvSpPr>
-          <p:cNvPr id="32" name="Shape 27"/>
-          <p:cNvSpPr/>
-          <p:nvPr/>
-        </p:nvSpPr>
-        <p:spPr>
-          <a:xfrm>
-            <a:off x="4754880" y="2862072"/>
+          <p:cNvPr id="40" name="Shape 34"/>
+          <p:cNvSpPr/>
+          <p:nvPr/>
+        </p:nvSpPr>
+        <p:spPr>
+          <a:xfrm>
+            <a:off x="4480560" y="2862072"/>
             <a:ext cx="201168" cy="201168"/>
           </a:xfrm>
           <a:prstGeom prst="oval">
@@ -6156,14 +6438,14 @@
       </p:sp>
       <p:sp>
         <p:nvSpPr>
-          <p:cNvPr id="33" name="Text 28"/>
-          <p:cNvSpPr/>
-          <p:nvPr/>
-        </p:nvSpPr>
-        <p:spPr>
-          <a:xfrm>
-            <a:off x="5047488" y="2788920"/>
-            <a:ext cx="3566160" cy="274320"/>
+          <p:cNvPr id="41" name="Text 35"/>
+          <p:cNvSpPr/>
+          <p:nvPr/>
+        </p:nvSpPr>
+        <p:spPr>
+          <a:xfrm>
+            <a:off x="4773168" y="2788920"/>
+            <a:ext cx="3840480" cy="274320"/>
           </a:xfrm>
           <a:prstGeom prst="rect">
             <a:avLst/>
@@ -6192,14 +6474,14 @@
       </p:sp>
       <p:sp>
         <p:nvSpPr>
-          <p:cNvPr id="34" name="Text 29"/>
-          <p:cNvSpPr/>
-          <p:nvPr/>
-        </p:nvSpPr>
-        <p:spPr>
-          <a:xfrm>
-            <a:off x="5047488" y="3044952"/>
-            <a:ext cx="3566160" cy="256032"/>
+          <p:cNvPr id="42" name="Text 36"/>
+          <p:cNvSpPr/>
+          <p:nvPr/>
+        </p:nvSpPr>
+        <p:spPr>
+          <a:xfrm>
+            <a:off x="4773168" y="3044952"/>
+            <a:ext cx="3840480" cy="256032"/>
           </a:xfrm>
           <a:prstGeom prst="rect">
             <a:avLst/>
@@ -6228,13 +6510,13 @@
       </p:sp>
       <p:sp>
         <p:nvSpPr>
-          <p:cNvPr id="35" name="Shape 30"/>
-          <p:cNvSpPr/>
-          <p:nvPr/>
-        </p:nvSpPr>
-        <p:spPr>
-          <a:xfrm>
-            <a:off x="4754880" y="3410712"/>
+          <p:cNvPr id="43" name="Shape 37"/>
+          <p:cNvSpPr/>
+          <p:nvPr/>
+        </p:nvSpPr>
+        <p:spPr>
+          <a:xfrm>
+            <a:off x="4480560" y="3410712"/>
             <a:ext cx="201168" cy="201168"/>
           </a:xfrm>
           <a:prstGeom prst="oval">
@@ -6253,14 +6535,14 @@
       </p:sp>
       <p:sp>
         <p:nvSpPr>
-          <p:cNvPr id="36" name="Text 31"/>
-          <p:cNvSpPr/>
-          <p:nvPr/>
-        </p:nvSpPr>
-        <p:spPr>
-          <a:xfrm>
-            <a:off x="5047488" y="3337560"/>
-            <a:ext cx="3566160" cy="274320"/>
+          <p:cNvPr id="44" name="Text 38"/>
+          <p:cNvSpPr/>
+          <p:nvPr/>
+        </p:nvSpPr>
+        <p:spPr>
+          <a:xfrm>
+            <a:off x="4773168" y="3337560"/>
+            <a:ext cx="3840480" cy="274320"/>
           </a:xfrm>
           <a:prstGeom prst="rect">
             <a:avLst/>
@@ -6289,14 +6571,14 @@
       </p:sp>
       <p:sp>
         <p:nvSpPr>
-          <p:cNvPr id="37" name="Text 32"/>
-          <p:cNvSpPr/>
-          <p:nvPr/>
-        </p:nvSpPr>
-        <p:spPr>
-          <a:xfrm>
-            <a:off x="5047488" y="3593592"/>
-            <a:ext cx="3566160" cy="256032"/>
+          <p:cNvPr id="45" name="Text 39"/>
+          <p:cNvSpPr/>
+          <p:nvPr/>
+        </p:nvSpPr>
+        <p:spPr>
+          <a:xfrm>
+            <a:off x="4773168" y="3593592"/>
+            <a:ext cx="3840480" cy="256032"/>
           </a:xfrm>
           <a:prstGeom prst="rect">
             <a:avLst/>
@@ -6317,7 +6599,7 @@
                   <a:srgbClr val="7B9CB8"/>
                 </a:solidFill>
               </a:rPr>
-              <a:t>Fast SQL window queries for anomaly detection</a:t>
+              <a:t>Fast SQL window queries for anomaly &amp; trend detection</a:t>
             </a:r>
             <a:endParaRPr lang="en-US" sz="950" dirty="0"/>
           </a:p>
@@ -6325,13 +6607,13 @@
       </p:sp>
       <p:sp>
         <p:nvSpPr>
-          <p:cNvPr id="38" name="Shape 33"/>
-          <p:cNvSpPr/>
-          <p:nvPr/>
-        </p:nvSpPr>
-        <p:spPr>
-          <a:xfrm>
-            <a:off x="4754880" y="3959352"/>
+          <p:cNvPr id="46" name="Shape 40"/>
+          <p:cNvSpPr/>
+          <p:nvPr/>
+        </p:nvSpPr>
+        <p:spPr>
+          <a:xfrm>
+            <a:off x="4480560" y="3959352"/>
             <a:ext cx="201168" cy="201168"/>
           </a:xfrm>
           <a:prstGeom prst="oval">
@@ -6350,14 +6632,14 @@
       </p:sp>
       <p:sp>
         <p:nvSpPr>
-          <p:cNvPr id="39" name="Text 34"/>
-          <p:cNvSpPr/>
-          <p:nvPr/>
-        </p:nvSpPr>
-        <p:spPr>
-          <a:xfrm>
-            <a:off x="5047488" y="3886200"/>
-            <a:ext cx="3566160" cy="274320"/>
+          <p:cNvPr id="47" name="Text 41"/>
+          <p:cNvSpPr/>
+          <p:nvPr/>
+        </p:nvSpPr>
+        <p:spPr>
+          <a:xfrm>
+            <a:off x="4773168" y="3886200"/>
+            <a:ext cx="3840480" cy="274320"/>
           </a:xfrm>
           <a:prstGeom prst="rect">
             <a:avLst/>
@@ -6378,7 +6660,7 @@
                   <a:srgbClr val="FFFFFF"/>
                 </a:solidFill>
               </a:rPr>
-              <a:t>Run ID Hashing</a:t>
+              <a:t>SQL SLA Thresholds</a:t>
             </a:r>
             <a:endParaRPr lang="en-US" sz="1100" dirty="0"/>
           </a:p>
@@ -6386,14 +6668,14 @@
       </p:sp>
       <p:sp>
         <p:nvSpPr>
-          <p:cNvPr id="40" name="Text 35"/>
-          <p:cNvSpPr/>
-          <p:nvPr/>
-        </p:nvSpPr>
-        <p:spPr>
-          <a:xfrm>
-            <a:off x="5047488" y="4142232"/>
-            <a:ext cx="3566160" cy="256032"/>
+          <p:cNvPr id="48" name="Text 42"/>
+          <p:cNvSpPr/>
+          <p:nvPr/>
+        </p:nvSpPr>
+        <p:spPr>
+          <a:xfrm>
+            <a:off x="4773168" y="4142232"/>
+            <a:ext cx="3840480" cy="256032"/>
           </a:xfrm>
           <a:prstGeom prst="rect">
             <a:avLst/>
@@ -6414,7 +6696,7 @@
                   <a:srgbClr val="7B9CB8"/>
                 </a:solidFill>
               </a:rPr>
-              <a:t>Multiple runs coexist — compare across test cycles</a:t>
+              <a:t>PLE, buffer cache hit %, deadlocks — all checked automatically</a:t>
             </a:r>
             <a:endParaRPr lang="en-US" sz="950" dirty="0"/>
           </a:p>
@@ -6461,7 +6743,7 @@
         <p:spPr>
           <a:xfrm>
             <a:off x="457200" y="256032"/>
-            <a:ext cx="1371600" cy="237744"/>
+            <a:ext cx="1463040" cy="237744"/>
           </a:xfrm>
           <a:prstGeom prst="rect">
             <a:avLst/>
@@ -6486,7 +6768,7 @@
         <p:spPr>
           <a:xfrm>
             <a:off x="457200" y="256032"/>
-            <a:ext cx="1371600" cy="237744"/>
+            <a:ext cx="1463040" cy="237744"/>
           </a:xfrm>
           <a:prstGeom prst="rect">
             <a:avLst/>
@@ -7218,7 +7500,7 @@
                   <a:srgbClr val="7B9CB8"/>
                 </a:solidFill>
               </a:rPr>
-              <a:t>SLA breach detection: p95 latency, error rate &gt;1%, TPS drop. Maps to business KPI.</a:t>
+              <a:t>SLA breach detection: p95, error rate, TPS drop, SQL PLE, deadlocks &amp; more.</a:t>
             </a:r>
             <a:endParaRPr lang="en-US" sz="950" dirty="0"/>
           </a:p>
@@ -7820,7 +8102,7 @@
         <p:spPr>
           <a:xfrm>
             <a:off x="457200" y="256032"/>
-            <a:ext cx="1371600" cy="237744"/>
+            <a:ext cx="1463040" cy="237744"/>
           </a:xfrm>
           <a:prstGeom prst="rect">
             <a:avLst/>
@@ -7845,7 +8127,7 @@
         <p:spPr>
           <a:xfrm>
             <a:off x="457200" y="256032"/>
-            <a:ext cx="1371600" cy="237744"/>
+            <a:ext cx="1463040" cy="237744"/>
           </a:xfrm>
           <a:prstGeom prst="rect">
             <a:avLst/>
@@ -8711,7 +8993,7 @@
                   <a:srgbClr val="7B9CB8"/>
                 </a:solidFill>
               </a:rPr>
-              <a:t>.BLG + IIS + LoadRunner all point to same issue</a:t>
+              <a:t>.BLG + IIS + LR + SQL all point to same issue</a:t>
             </a:r>
             <a:endParaRPr lang="en-US" sz="1000" dirty="0"/>
           </a:p>
@@ -8813,7 +9095,7 @@
                   <a:srgbClr val="7B9CB8"/>
                 </a:solidFill>
               </a:rPr>
-              <a:t>2 of 3 sources corroborate the finding</a:t>
+              <a:t>2–3 of 4 sources corroborate the finding</a:t>
             </a:r>
             <a:endParaRPr lang="en-US" sz="1000" dirty="0"/>
           </a:p>
@@ -8951,7 +9233,7 @@
                   <a:srgbClr val="7B9CB8"/>
                 </a:solidFill>
               </a:rPr>
-              <a:t>This mirrors how senior engineers think — a finding only seen in one log is suspicious; one corroborated by all three is definitive.</a:t>
+              <a:t>This mirrors how senior engineers think — a finding only seen in one log is suspicious; one corroborated by all four is definitive.</a:t>
             </a:r>
             <a:endParaRPr lang="en-US" sz="950" dirty="0"/>
           </a:p>
@@ -8998,7 +9280,7 @@
         <p:spPr>
           <a:xfrm>
             <a:off x="457200" y="256032"/>
-            <a:ext cx="1371600" cy="237744"/>
+            <a:ext cx="1463040" cy="237744"/>
           </a:xfrm>
           <a:prstGeom prst="rect">
             <a:avLst/>
@@ -9023,7 +9305,7 @@
         <p:spPr>
           <a:xfrm>
             <a:off x="457200" y="256032"/>
-            <a:ext cx="1371600" cy="237744"/>
+            <a:ext cx="1463040" cy="237744"/>
           </a:xfrm>
           <a:prstGeom prst="rect">
             <a:avLst/>
@@ -9080,7 +9362,7 @@
                   <a:srgbClr val="FFFFFF"/>
                 </a:solidFill>
               </a:rPr>
-              <a:t>Auto-Generated Report — HTML + PDF, in Seconds</a:t>
+              <a:t>Three Ways to View Your RCA Report</a:t>
             </a:r>
             <a:endParaRPr lang="en-US" sz="2400" dirty="0"/>
           </a:p>
@@ -9094,8 +9376,254 @@
         </p:nvSpPr>
         <p:spPr>
           <a:xfrm>
-            <a:off x="365760" y="1234440"/>
-            <a:ext cx="4114800" cy="1600200"/>
+            <a:off x="320040" y="1234440"/>
+            <a:ext cx="2697480" cy="3520440"/>
+          </a:xfrm>
+          <a:prstGeom prst="rect">
+            <a:avLst/>
+          </a:prstGeom>
+          <a:solidFill>
+            <a:srgbClr val="0D2137"/>
+          </a:solidFill>
+          <a:ln w="25400">
+            <a:solidFill>
+              <a:srgbClr val="00C9A7"/>
+            </a:solidFill>
+            <a:prstDash val="solid"/>
+          </a:ln>
+          <a:effectLst>
+            <a:outerShdw sx="100000" sy="100000" kx="0" ky="0" algn="bl" rotWithShape="0" blurRad="101600" dist="38100" dir="8100000">
+              <a:srgbClr val="000000">
+                <a:alpha val="18000"/>
+              </a:srgbClr>
+            </a:outerShdw>
+          </a:effectLst>
+        </p:spPr>
+      </p:sp>
+      <p:sp>
+        <p:nvSpPr>
+          <p:cNvPr id="6" name="Shape 4"/>
+          <p:cNvSpPr/>
+          <p:nvPr/>
+        </p:nvSpPr>
+        <p:spPr>
+          <a:xfrm>
+            <a:off x="320040" y="1234440"/>
+            <a:ext cx="2697480" cy="64008"/>
+          </a:xfrm>
+          <a:prstGeom prst="rect">
+            <a:avLst/>
+          </a:prstGeom>
+          <a:solidFill>
+            <a:srgbClr val="00C9A7"/>
+          </a:solidFill>
+          <a:ln w="12700">
+            <a:solidFill>
+              <a:srgbClr val="00C9A7"/>
+            </a:solidFill>
+            <a:prstDash val="solid"/>
+          </a:ln>
+        </p:spPr>
+      </p:sp>
+      <p:sp>
+        <p:nvSpPr>
+          <p:cNvPr id="7" name="Shape 5"/>
+          <p:cNvSpPr/>
+          <p:nvPr/>
+        </p:nvSpPr>
+        <p:spPr>
+          <a:xfrm>
+            <a:off x="1344168" y="1426464"/>
+            <a:ext cx="658368" cy="658368"/>
+          </a:xfrm>
+          <a:prstGeom prst="oval">
+            <a:avLst/>
+          </a:prstGeom>
+          <a:solidFill>
+            <a:srgbClr val="00C9A7">
+              <a:alpha val="80000"/>
+            </a:srgbClr>
+          </a:solidFill>
+          <a:ln w="12700">
+            <a:solidFill>
+              <a:srgbClr val="00C9A7"/>
+            </a:solidFill>
+            <a:prstDash val="solid"/>
+          </a:ln>
+        </p:spPr>
+      </p:sp>
+      <p:pic>
+        <p:nvPicPr>
+          <p:cNvPr id="8" name="Image 0" descr="preencoded.png">    </p:cNvPr>
+          <p:cNvPicPr>
+            <a:picLocks noChangeAspect="1"/>
+          </p:cNvPicPr>
+          <p:nvPr/>
+        </p:nvPicPr>
+        <p:blipFill>
+          <a:blip r:embed="rId1"/>
+          <a:stretch>
+            <a:fillRect/>
+          </a:stretch>
+        </p:blipFill>
+        <p:spPr>
+          <a:xfrm>
+            <a:off x="1399032" y="1481328"/>
+            <a:ext cx="548640" cy="548640"/>
+          </a:xfrm>
+          <a:prstGeom prst="rect">
+            <a:avLst/>
+          </a:prstGeom>
+        </p:spPr>
+      </p:pic>
+      <p:sp>
+        <p:nvSpPr>
+          <p:cNvPr id="9" name="Text 6"/>
+          <p:cNvSpPr/>
+          <p:nvPr/>
+        </p:nvSpPr>
+        <p:spPr>
+          <a:xfrm>
+            <a:off x="411480" y="2212848"/>
+            <a:ext cx="2514600" cy="384048"/>
+          </a:xfrm>
+          <a:prstGeom prst="rect">
+            <a:avLst/>
+          </a:prstGeom>
+          <a:noFill/>
+          <a:ln/>
+        </p:spPr>
+        <p:txBody>
+          <a:bodyPr wrap="square" rtlCol="0" anchor="ctr"/>
+          <a:lstStyle/>
+          <a:p>
+            <a:pPr algn="ctr" indent="0" marL="0">
+              <a:buNone/>
+            </a:pPr>
+            <a:r>
+              <a:rPr lang="en-US" sz="1300" b="1" dirty="0">
+                <a:solidFill>
+                  <a:srgbClr val="FFFFFF"/>
+                </a:solidFill>
+              </a:rPr>
+              <a:t>Streamlit Web UI</a:t>
+            </a:r>
+            <a:endParaRPr lang="en-US" sz="1300" dirty="0"/>
+          </a:p>
+        </p:txBody>
+      </p:sp>
+      <p:sp>
+        <p:nvSpPr>
+          <p:cNvPr id="10" name="Text 7"/>
+          <p:cNvSpPr/>
+          <p:nvPr/>
+        </p:nvSpPr>
+        <p:spPr>
+          <a:xfrm>
+            <a:off x="429768" y="2670048"/>
+            <a:ext cx="2487168" cy="1920240"/>
+          </a:xfrm>
+          <a:prstGeom prst="rect">
+            <a:avLst/>
+          </a:prstGeom>
+          <a:noFill/>
+          <a:ln/>
+        </p:spPr>
+        <p:txBody>
+          <a:bodyPr wrap="square" rtlCol="0" anchor="ctr"/>
+          <a:lstStyle/>
+          <a:p>
+            <a:pPr algn="ctr" indent="0" marL="0">
+              <a:lnSpc>
+                <a:spcPct val="135000"/>
+              </a:lnSpc>
+              <a:buNone/>
+            </a:pPr>
+            <a:r>
+              <a:rPr lang="en-US" sz="1000" dirty="0">
+                <a:solidFill>
+                  <a:srgbClr val="7B9CB8"/>
+                </a:solidFill>
+              </a:rPr>
+              <a:t>Upload logs from any location. Phase-by-phase progress, live verdict badge, tabbed findings, download buttons — all in-browser. No CLI needed.</a:t>
+            </a:r>
+            <a:endParaRPr lang="en-US" sz="1000" dirty="0"/>
+          </a:p>
+        </p:txBody>
+      </p:sp>
+      <p:sp>
+        <p:nvSpPr>
+          <p:cNvPr id="11" name="Shape 8"/>
+          <p:cNvSpPr/>
+          <p:nvPr/>
+        </p:nvSpPr>
+        <p:spPr>
+          <a:xfrm>
+            <a:off x="941832" y="4645152"/>
+            <a:ext cx="1463040" cy="237744"/>
+          </a:xfrm>
+          <a:prstGeom prst="rect">
+            <a:avLst/>
+          </a:prstGeom>
+          <a:solidFill>
+            <a:srgbClr val="00C9A7">
+              <a:alpha val="90000"/>
+            </a:srgbClr>
+          </a:solidFill>
+          <a:ln w="12700">
+            <a:solidFill>
+              <a:srgbClr val="00C9A7"/>
+            </a:solidFill>
+            <a:prstDash val="solid"/>
+          </a:ln>
+        </p:spPr>
+      </p:sp>
+      <p:sp>
+        <p:nvSpPr>
+          <p:cNvPr id="12" name="Text 9"/>
+          <p:cNvSpPr/>
+          <p:nvPr/>
+        </p:nvSpPr>
+        <p:spPr>
+          <a:xfrm>
+            <a:off x="941832" y="4645152"/>
+            <a:ext cx="1463040" cy="237744"/>
+          </a:xfrm>
+          <a:prstGeom prst="rect">
+            <a:avLst/>
+          </a:prstGeom>
+          <a:noFill/>
+          <a:ln/>
+        </p:spPr>
+        <p:txBody>
+          <a:bodyPr wrap="square" lIns="0" tIns="0" rIns="0" bIns="0" rtlCol="0" anchor="ctr"/>
+          <a:lstStyle/>
+          <a:p>
+            <a:pPr algn="ctr" indent="0" marL="0">
+              <a:buNone/>
+            </a:pPr>
+            <a:r>
+              <a:rPr lang="en-US" sz="900" b="1" dirty="0">
+                <a:solidFill>
+                  <a:srgbClr val="FFFFFF"/>
+                </a:solidFill>
+              </a:rPr>
+              <a:t>NEW</a:t>
+            </a:r>
+            <a:endParaRPr lang="en-US" sz="900" dirty="0"/>
+          </a:p>
+        </p:txBody>
+      </p:sp>
+      <p:sp>
+        <p:nvSpPr>
+          <p:cNvPr id="13" name="Shape 10"/>
+          <p:cNvSpPr/>
+          <p:nvPr/>
+        </p:nvSpPr>
+        <p:spPr>
+          <a:xfrm>
+            <a:off x="3246120" y="1234440"/>
+            <a:ext cx="2697480" cy="3520440"/>
           </a:xfrm>
           <a:prstGeom prst="rect">
             <a:avLst/>
@@ -9120,14 +9648,14 @@
       </p:sp>
       <p:sp>
         <p:nvSpPr>
-          <p:cNvPr id="6" name="Shape 4"/>
-          <p:cNvSpPr/>
-          <p:nvPr/>
-        </p:nvSpPr>
-        <p:spPr>
-          <a:xfrm>
-            <a:off x="365760" y="1234440"/>
-            <a:ext cx="4114800" cy="64008"/>
+          <p:cNvPr id="14" name="Shape 11"/>
+          <p:cNvSpPr/>
+          <p:nvPr/>
+        </p:nvSpPr>
+        <p:spPr>
+          <a:xfrm>
+            <a:off x="3246120" y="1234440"/>
+            <a:ext cx="2697480" cy="64008"/>
           </a:xfrm>
           <a:prstGeom prst="rect">
             <a:avLst/>
@@ -9143,24 +9671,51 @@
           </a:ln>
         </p:spPr>
       </p:sp>
+      <p:sp>
+        <p:nvSpPr>
+          <p:cNvPr id="15" name="Shape 12"/>
+          <p:cNvSpPr/>
+          <p:nvPr/>
+        </p:nvSpPr>
+        <p:spPr>
+          <a:xfrm>
+            <a:off x="4270248" y="1426464"/>
+            <a:ext cx="658368" cy="658368"/>
+          </a:xfrm>
+          <a:prstGeom prst="oval">
+            <a:avLst/>
+          </a:prstGeom>
+          <a:solidFill>
+            <a:srgbClr val="FFB300">
+              <a:alpha val="80000"/>
+            </a:srgbClr>
+          </a:solidFill>
+          <a:ln w="12700">
+            <a:solidFill>
+              <a:srgbClr val="FFB300"/>
+            </a:solidFill>
+            <a:prstDash val="solid"/>
+          </a:ln>
+        </p:spPr>
+      </p:sp>
       <p:pic>
         <p:nvPicPr>
-          <p:cNvPr id="7" name="Image 0" descr="preencoded.png">    </p:cNvPr>
+          <p:cNvPr id="16" name="Image 1" descr="preencoded.png">    </p:cNvPr>
           <p:cNvPicPr>
             <a:picLocks noChangeAspect="1"/>
           </p:cNvPicPr>
           <p:nvPr/>
         </p:nvPicPr>
         <p:blipFill>
-          <a:blip r:embed="rId1"/>
+          <a:blip r:embed="rId2"/>
           <a:stretch>
             <a:fillRect/>
           </a:stretch>
         </p:blipFill>
         <p:spPr>
           <a:xfrm>
-            <a:off x="502920" y="1417320"/>
-            <a:ext cx="438912" cy="438912"/>
+            <a:off x="4325112" y="1481328"/>
+            <a:ext cx="548640" cy="548640"/>
           </a:xfrm>
           <a:prstGeom prst="rect">
             <a:avLst/>
@@ -9169,26 +9724,26 @@
       </p:pic>
       <p:sp>
         <p:nvSpPr>
-          <p:cNvPr id="8" name="Text 5"/>
-          <p:cNvSpPr/>
-          <p:nvPr/>
-        </p:nvSpPr>
-        <p:spPr>
-          <a:xfrm>
-            <a:off x="1051560" y="1417320"/>
-            <a:ext cx="3291840" cy="365760"/>
-          </a:xfrm>
-          <a:prstGeom prst="rect">
-            <a:avLst/>
-          </a:prstGeom>
-          <a:noFill/>
-          <a:ln/>
-        </p:spPr>
-        <p:txBody>
-          <a:bodyPr wrap="square" rtlCol="0" anchor="ctr"/>
-          <a:lstStyle/>
-          <a:p>
-            <a:pPr indent="0" marL="0">
+          <p:cNvPr id="17" name="Text 13"/>
+          <p:cNvSpPr/>
+          <p:nvPr/>
+        </p:nvSpPr>
+        <p:spPr>
+          <a:xfrm>
+            <a:off x="3337560" y="2212848"/>
+            <a:ext cx="2514600" cy="384048"/>
+          </a:xfrm>
+          <a:prstGeom prst="rect">
+            <a:avLst/>
+          </a:prstGeom>
+          <a:noFill/>
+          <a:ln/>
+        </p:spPr>
+        <p:txBody>
+          <a:bodyPr wrap="square" rtlCol="0" anchor="ctr"/>
+          <a:lstStyle/>
+          <a:p>
+            <a:pPr algn="ctr" indent="0" marL="0">
               <a:buNone/>
             </a:pPr>
             <a:r>
@@ -9197,7 +9752,7 @@
                   <a:srgbClr val="FFFFFF"/>
                 </a:solidFill>
               </a:rPr>
-              <a:t>Executive Summary</a:t>
+              <a:t>HTML Report</a:t>
             </a:r>
             <a:endParaRPr lang="en-US" sz="1300" dirty="0"/>
           </a:p>
@@ -9205,28 +9760,28 @@
       </p:sp>
       <p:sp>
         <p:nvSpPr>
-          <p:cNvPr id="9" name="Text 6"/>
-          <p:cNvSpPr/>
-          <p:nvPr/>
-        </p:nvSpPr>
-        <p:spPr>
-          <a:xfrm>
-            <a:off x="502920" y="1984248"/>
-            <a:ext cx="3840480" cy="777240"/>
-          </a:xfrm>
-          <a:prstGeom prst="rect">
-            <a:avLst/>
-          </a:prstGeom>
-          <a:noFill/>
-          <a:ln/>
-        </p:spPr>
-        <p:txBody>
-          <a:bodyPr wrap="square" rtlCol="0" anchor="ctr"/>
-          <a:lstStyle/>
-          <a:p>
-            <a:pPr indent="0" marL="0">
+          <p:cNvPr id="18" name="Text 14"/>
+          <p:cNvSpPr/>
+          <p:nvPr/>
+        </p:nvSpPr>
+        <p:spPr>
+          <a:xfrm>
+            <a:off x="3355848" y="2670048"/>
+            <a:ext cx="2487168" cy="1920240"/>
+          </a:xfrm>
+          <a:prstGeom prst="rect">
+            <a:avLst/>
+          </a:prstGeom>
+          <a:noFill/>
+          <a:ln/>
+        </p:spPr>
+        <p:txBody>
+          <a:bodyPr wrap="square" rtlCol="0" anchor="ctr"/>
+          <a:lstStyle/>
+          <a:p>
+            <a:pPr algn="ctr" indent="0" marL="0">
               <a:lnSpc>
-                <a:spcPct val="130000"/>
+                <a:spcPct val="135000"/>
               </a:lnSpc>
               <a:buNone/>
             </a:pPr>
@@ -9236,7 +9791,7 @@
                   <a:srgbClr val="7B9CB8"/>
                 </a:solidFill>
               </a:rPr>
-              <a:t>Pass/Fail verdict, SLA breach count, top 3 findings, risk rating and recommended immediate actions.</a:t>
+              <a:t>Full dark-theme interactive report. Executive summary, KPI tiles, anomaly tables, cause-effect chain, timeline. Opens in any browser.</a:t>
             </a:r>
             <a:endParaRPr lang="en-US" sz="1000" dirty="0"/>
           </a:p>
@@ -9244,14 +9799,14 @@
       </p:sp>
       <p:sp>
         <p:nvSpPr>
-          <p:cNvPr id="10" name="Shape 7"/>
-          <p:cNvSpPr/>
-          <p:nvPr/>
-        </p:nvSpPr>
-        <p:spPr>
-          <a:xfrm>
-            <a:off x="4709160" y="1234440"/>
-            <a:ext cx="4114800" cy="1600200"/>
+          <p:cNvPr id="19" name="Shape 15"/>
+          <p:cNvSpPr/>
+          <p:nvPr/>
+        </p:nvSpPr>
+        <p:spPr>
+          <a:xfrm>
+            <a:off x="6172200" y="1234440"/>
+            <a:ext cx="2697480" cy="3520440"/>
           </a:xfrm>
           <a:prstGeom prst="rect">
             <a:avLst/>
@@ -9276,14 +9831,14 @@
       </p:sp>
       <p:sp>
         <p:nvSpPr>
-          <p:cNvPr id="11" name="Shape 8"/>
-          <p:cNvSpPr/>
-          <p:nvPr/>
-        </p:nvSpPr>
-        <p:spPr>
-          <a:xfrm>
-            <a:off x="4709160" y="1234440"/>
-            <a:ext cx="4114800" cy="64008"/>
+          <p:cNvPr id="20" name="Shape 16"/>
+          <p:cNvSpPr/>
+          <p:nvPr/>
+        </p:nvSpPr>
+        <p:spPr>
+          <a:xfrm>
+            <a:off x="6172200" y="1234440"/>
+            <a:ext cx="2697480" cy="64008"/>
           </a:xfrm>
           <a:prstGeom prst="rect">
             <a:avLst/>
@@ -9299,165 +9854,36 @@
           </a:ln>
         </p:spPr>
       </p:sp>
-      <p:pic>
-        <p:nvPicPr>
-          <p:cNvPr id="12" name="Image 1" descr="preencoded.png">    </p:cNvPr>
-          <p:cNvPicPr>
-            <a:picLocks noChangeAspect="1"/>
-          </p:cNvPicPr>
-          <p:nvPr/>
-        </p:nvPicPr>
-        <p:blipFill>
-          <a:blip r:embed="rId2"/>
-          <a:stretch>
-            <a:fillRect/>
-          </a:stretch>
-        </p:blipFill>
-        <p:spPr>
-          <a:xfrm>
-            <a:off x="4846320" y="1417320"/>
-            <a:ext cx="438912" cy="438912"/>
-          </a:xfrm>
-          <a:prstGeom prst="rect">
-            <a:avLst/>
-          </a:prstGeom>
-        </p:spPr>
-      </p:pic>
-      <p:sp>
-        <p:nvSpPr>
-          <p:cNvPr id="13" name="Text 9"/>
-          <p:cNvSpPr/>
-          <p:nvPr/>
-        </p:nvSpPr>
-        <p:spPr>
-          <a:xfrm>
-            <a:off x="5394960" y="1417320"/>
-            <a:ext cx="3291840" cy="365760"/>
-          </a:xfrm>
-          <a:prstGeom prst="rect">
-            <a:avLst/>
-          </a:prstGeom>
-          <a:noFill/>
-          <a:ln/>
-        </p:spPr>
-        <p:txBody>
-          <a:bodyPr wrap="square" rtlCol="0" anchor="ctr"/>
-          <a:lstStyle/>
-          <a:p>
-            <a:pPr indent="0" marL="0">
-              <a:buNone/>
-            </a:pPr>
-            <a:r>
-              <a:rPr lang="en-US" sz="1300" b="1" dirty="0">
-                <a:solidFill>
-                  <a:srgbClr val="FFFFFF"/>
-                </a:solidFill>
-              </a:rPr>
-              <a:t>Metric Deep Dive</a:t>
-            </a:r>
-            <a:endParaRPr lang="en-US" sz="1300" dirty="0"/>
-          </a:p>
-        </p:txBody>
-      </p:sp>
-      <p:sp>
-        <p:nvSpPr>
-          <p:cNvPr id="14" name="Text 10"/>
-          <p:cNvSpPr/>
-          <p:nvPr/>
-        </p:nvSpPr>
-        <p:spPr>
-          <a:xfrm>
-            <a:off x="4846320" y="1984248"/>
-            <a:ext cx="3840480" cy="777240"/>
-          </a:xfrm>
-          <a:prstGeom prst="rect">
-            <a:avLst/>
-          </a:prstGeom>
-          <a:noFill/>
-          <a:ln/>
-        </p:spPr>
-        <p:txBody>
-          <a:bodyPr wrap="square" rtlCol="0" anchor="ctr"/>
-          <a:lstStyle/>
-          <a:p>
-            <a:pPr indent="0" marL="0">
-              <a:lnSpc>
-                <a:spcPct val="130000"/>
-              </a:lnSpc>
-              <a:buNone/>
-            </a:pPr>
-            <a:r>
-              <a:rPr lang="en-US" sz="1000" dirty="0">
-                <a:solidFill>
-                  <a:srgbClr val="7B9CB8"/>
-                </a:solidFill>
-              </a:rPr>
-              <a:t>Time-series breakdowns per source with p50/p90/p95/p99 percentile tables and threshold breach timelines.</a:t>
-            </a:r>
-            <a:endParaRPr lang="en-US" sz="1000" dirty="0"/>
-          </a:p>
-        </p:txBody>
-      </p:sp>
-      <p:sp>
-        <p:nvSpPr>
-          <p:cNvPr id="15" name="Shape 11"/>
-          <p:cNvSpPr/>
-          <p:nvPr/>
-        </p:nvSpPr>
-        <p:spPr>
-          <a:xfrm>
-            <a:off x="365760" y="3154680"/>
-            <a:ext cx="4114800" cy="1600200"/>
-          </a:xfrm>
-          <a:prstGeom prst="rect">
-            <a:avLst/>
-          </a:prstGeom>
-          <a:solidFill>
-            <a:srgbClr val="0D2137"/>
-          </a:solidFill>
-          <a:ln w="25400">
+      <p:sp>
+        <p:nvSpPr>
+          <p:cNvPr id="21" name="Shape 17"/>
+          <p:cNvSpPr/>
+          <p:nvPr/>
+        </p:nvSpPr>
+        <p:spPr>
+          <a:xfrm>
+            <a:off x="7196328" y="1426464"/>
+            <a:ext cx="658368" cy="658368"/>
+          </a:xfrm>
+          <a:prstGeom prst="oval">
+            <a:avLst/>
+          </a:prstGeom>
+          <a:solidFill>
+            <a:srgbClr val="1E88E5">
+              <a:alpha val="80000"/>
+            </a:srgbClr>
+          </a:solidFill>
+          <a:ln w="12700">
             <a:solidFill>
-              <a:srgbClr val="AB47BC"/>
+              <a:srgbClr val="1E88E5"/>
             </a:solidFill>
             <a:prstDash val="solid"/>
           </a:ln>
-          <a:effectLst>
-            <a:outerShdw sx="100000" sy="100000" kx="0" ky="0" algn="bl" rotWithShape="0" blurRad="101600" dist="38100" dir="8100000">
-              <a:srgbClr val="000000">
-                <a:alpha val="18000"/>
-              </a:srgbClr>
-            </a:outerShdw>
-          </a:effectLst>
-        </p:spPr>
-      </p:sp>
-      <p:sp>
-        <p:nvSpPr>
-          <p:cNvPr id="16" name="Shape 12"/>
-          <p:cNvSpPr/>
-          <p:nvPr/>
-        </p:nvSpPr>
-        <p:spPr>
-          <a:xfrm>
-            <a:off x="365760" y="3154680"/>
-            <a:ext cx="4114800" cy="64008"/>
-          </a:xfrm>
-          <a:prstGeom prst="rect">
-            <a:avLst/>
-          </a:prstGeom>
-          <a:solidFill>
-            <a:srgbClr val="AB47BC"/>
-          </a:solidFill>
-          <a:ln w="12700">
-            <a:solidFill>
-              <a:srgbClr val="AB47BC"/>
-            </a:solidFill>
-            <a:prstDash val="solid"/>
-          </a:ln>
         </p:spPr>
       </p:sp>
       <p:pic>
         <p:nvPicPr>
-          <p:cNvPr id="17" name="Image 2" descr="preencoded.png">    </p:cNvPr>
+          <p:cNvPr id="22" name="Image 2" descr="preencoded.png">    </p:cNvPr>
           <p:cNvPicPr>
             <a:picLocks noChangeAspect="1"/>
           </p:cNvPicPr>
@@ -9471,8 +9897,8 @@
         </p:blipFill>
         <p:spPr>
           <a:xfrm>
-            <a:off x="502920" y="3337560"/>
-            <a:ext cx="438912" cy="438912"/>
+            <a:off x="7251192" y="1481328"/>
+            <a:ext cx="548640" cy="548640"/>
           </a:xfrm>
           <a:prstGeom prst="rect">
             <a:avLst/>
@@ -9481,26 +9907,26 @@
       </p:pic>
       <p:sp>
         <p:nvSpPr>
-          <p:cNvPr id="18" name="Text 13"/>
-          <p:cNvSpPr/>
-          <p:nvPr/>
-        </p:nvSpPr>
-        <p:spPr>
-          <a:xfrm>
-            <a:off x="1051560" y="3337560"/>
-            <a:ext cx="3291840" cy="365760"/>
-          </a:xfrm>
-          <a:prstGeom prst="rect">
-            <a:avLst/>
-          </a:prstGeom>
-          <a:noFill/>
-          <a:ln/>
-        </p:spPr>
-        <p:txBody>
-          <a:bodyPr wrap="square" rtlCol="0" anchor="ctr"/>
-          <a:lstStyle/>
-          <a:p>
-            <a:pPr indent="0" marL="0">
+          <p:cNvPr id="23" name="Text 18"/>
+          <p:cNvSpPr/>
+          <p:nvPr/>
+        </p:nvSpPr>
+        <p:spPr>
+          <a:xfrm>
+            <a:off x="6263640" y="2212848"/>
+            <a:ext cx="2514600" cy="384048"/>
+          </a:xfrm>
+          <a:prstGeom prst="rect">
+            <a:avLst/>
+          </a:prstGeom>
+          <a:noFill/>
+          <a:ln/>
+        </p:spPr>
+        <p:txBody>
+          <a:bodyPr wrap="square" rtlCol="0" anchor="ctr"/>
+          <a:lstStyle/>
+          <a:p>
+            <a:pPr algn="ctr" indent="0" marL="0">
               <a:buNone/>
             </a:pPr>
             <a:r>
@@ -9509,7 +9935,7 @@
                   <a:srgbClr val="FFFFFF"/>
                 </a:solidFill>
               </a:rPr>
-              <a:t>RCA Findings</a:t>
+              <a:t>PDF Export</a:t>
             </a:r>
             <a:endParaRPr lang="en-US" sz="1300" dirty="0"/>
           </a:p>
@@ -9517,28 +9943,28 @@
       </p:sp>
       <p:sp>
         <p:nvSpPr>
-          <p:cNvPr id="19" name="Text 14"/>
-          <p:cNvSpPr/>
-          <p:nvPr/>
-        </p:nvSpPr>
-        <p:spPr>
-          <a:xfrm>
-            <a:off x="502920" y="3904488"/>
-            <a:ext cx="3840480" cy="777240"/>
-          </a:xfrm>
-          <a:prstGeom prst="rect">
-            <a:avLst/>
-          </a:prstGeom>
-          <a:noFill/>
-          <a:ln/>
-        </p:spPr>
-        <p:txBody>
-          <a:bodyPr wrap="square" rtlCol="0" anchor="ctr"/>
-          <a:lstStyle/>
-          <a:p>
-            <a:pPr indent="0" marL="0">
+          <p:cNvPr id="24" name="Text 19"/>
+          <p:cNvSpPr/>
+          <p:nvPr/>
+        </p:nvSpPr>
+        <p:spPr>
+          <a:xfrm>
+            <a:off x="6281928" y="2670048"/>
+            <a:ext cx="2487168" cy="1920240"/>
+          </a:xfrm>
+          <a:prstGeom prst="rect">
+            <a:avLst/>
+          </a:prstGeom>
+          <a:noFill/>
+          <a:ln/>
+        </p:spPr>
+        <p:txBody>
+          <a:bodyPr wrap="square" rtlCol="0" anchor="ctr"/>
+          <a:lstStyle/>
+          <a:p>
+            <a:pPr algn="ctr" indent="0" marL="0">
               <a:lnSpc>
-                <a:spcPct val="130000"/>
+                <a:spcPct val="135000"/>
               </a:lnSpc>
               <a:buNone/>
             </a:pPr>
@@ -9548,163 +9974,7 @@
                   <a:srgbClr val="7B9CB8"/>
                 </a:solidFill>
               </a:rPr>
-              <a:t>Ranked root causes with evidence citations, confidence scores, cross-log correlation proof and LLM narrative.</a:t>
-            </a:r>
-            <a:endParaRPr lang="en-US" sz="1000" dirty="0"/>
-          </a:p>
-        </p:txBody>
-      </p:sp>
-      <p:sp>
-        <p:nvSpPr>
-          <p:cNvPr id="20" name="Shape 15"/>
-          <p:cNvSpPr/>
-          <p:nvPr/>
-        </p:nvSpPr>
-        <p:spPr>
-          <a:xfrm>
-            <a:off x="4709160" y="3154680"/>
-            <a:ext cx="4114800" cy="1600200"/>
-          </a:xfrm>
-          <a:prstGeom prst="rect">
-            <a:avLst/>
-          </a:prstGeom>
-          <a:solidFill>
-            <a:srgbClr val="0D2137"/>
-          </a:solidFill>
-          <a:ln w="25400">
-            <a:solidFill>
-              <a:srgbClr val="00C9A7"/>
-            </a:solidFill>
-            <a:prstDash val="solid"/>
-          </a:ln>
-          <a:effectLst>
-            <a:outerShdw sx="100000" sy="100000" kx="0" ky="0" algn="bl" rotWithShape="0" blurRad="101600" dist="38100" dir="8100000">
-              <a:srgbClr val="000000">
-                <a:alpha val="18000"/>
-              </a:srgbClr>
-            </a:outerShdw>
-          </a:effectLst>
-        </p:spPr>
-      </p:sp>
-      <p:sp>
-        <p:nvSpPr>
-          <p:cNvPr id="21" name="Shape 16"/>
-          <p:cNvSpPr/>
-          <p:nvPr/>
-        </p:nvSpPr>
-        <p:spPr>
-          <a:xfrm>
-            <a:off x="4709160" y="3154680"/>
-            <a:ext cx="4114800" cy="64008"/>
-          </a:xfrm>
-          <a:prstGeom prst="rect">
-            <a:avLst/>
-          </a:prstGeom>
-          <a:solidFill>
-            <a:srgbClr val="00C9A7"/>
-          </a:solidFill>
-          <a:ln w="12700">
-            <a:solidFill>
-              <a:srgbClr val="00C9A7"/>
-            </a:solidFill>
-            <a:prstDash val="solid"/>
-          </a:ln>
-        </p:spPr>
-      </p:sp>
-      <p:pic>
-        <p:nvPicPr>
-          <p:cNvPr id="22" name="Image 3" descr="preencoded.png">    </p:cNvPr>
-          <p:cNvPicPr>
-            <a:picLocks noChangeAspect="1"/>
-          </p:cNvPicPr>
-          <p:nvPr/>
-        </p:nvPicPr>
-        <p:blipFill>
-          <a:blip r:embed="rId4"/>
-          <a:stretch>
-            <a:fillRect/>
-          </a:stretch>
-        </p:blipFill>
-        <p:spPr>
-          <a:xfrm>
-            <a:off x="4846320" y="3337560"/>
-            <a:ext cx="438912" cy="438912"/>
-          </a:xfrm>
-          <a:prstGeom prst="rect">
-            <a:avLst/>
-          </a:prstGeom>
-        </p:spPr>
-      </p:pic>
-      <p:sp>
-        <p:nvSpPr>
-          <p:cNvPr id="23" name="Text 17"/>
-          <p:cNvSpPr/>
-          <p:nvPr/>
-        </p:nvSpPr>
-        <p:spPr>
-          <a:xfrm>
-            <a:off x="5394960" y="3337560"/>
-            <a:ext cx="3291840" cy="365760"/>
-          </a:xfrm>
-          <a:prstGeom prst="rect">
-            <a:avLst/>
-          </a:prstGeom>
-          <a:noFill/>
-          <a:ln/>
-        </p:spPr>
-        <p:txBody>
-          <a:bodyPr wrap="square" rtlCol="0" anchor="ctr"/>
-          <a:lstStyle/>
-          <a:p>
-            <a:pPr indent="0" marL="0">
-              <a:buNone/>
-            </a:pPr>
-            <a:r>
-              <a:rPr lang="en-US" sz="1300" b="1" dirty="0">
-                <a:solidFill>
-                  <a:srgbClr val="FFFFFF"/>
-                </a:solidFill>
-              </a:rPr>
-              <a:t>Recommendations</a:t>
-            </a:r>
-            <a:endParaRPr lang="en-US" sz="1300" dirty="0"/>
-          </a:p>
-        </p:txBody>
-      </p:sp>
-      <p:sp>
-        <p:nvSpPr>
-          <p:cNvPr id="24" name="Text 18"/>
-          <p:cNvSpPr/>
-          <p:nvPr/>
-        </p:nvSpPr>
-        <p:spPr>
-          <a:xfrm>
-            <a:off x="4846320" y="3904488"/>
-            <a:ext cx="3840480" cy="777240"/>
-          </a:xfrm>
-          <a:prstGeom prst="rect">
-            <a:avLst/>
-          </a:prstGeom>
-          <a:noFill/>
-          <a:ln/>
-        </p:spPr>
-        <p:txBody>
-          <a:bodyPr wrap="square" rtlCol="0" anchor="ctr"/>
-          <a:lstStyle/>
-          <a:p>
-            <a:pPr indent="0" marL="0">
-              <a:lnSpc>
-                <a:spcPct val="130000"/>
-              </a:lnSpc>
-              <a:buNone/>
-            </a:pPr>
-            <a:r>
-              <a:rPr lang="en-US" sz="1000" dirty="0">
-                <a:solidFill>
-                  <a:srgbClr val="7B9CB8"/>
-                </a:solidFill>
-              </a:rPr>
-              <a:t>Tuning actions per finding, re-test acceptance criteria and open risks flagged for the next sprint.</a:t>
+              <a:t>Clean white PDF with all findings — verdict, threshold breaches, anomalies, timeline. Ready to email or attach to a JIRA ticket.</a:t>
             </a:r>
             <a:endParaRPr lang="en-US" sz="1000" dirty="0"/>
           </a:p>
@@ -9751,7 +10021,7 @@
         <p:spPr>
           <a:xfrm>
             <a:off x="457200" y="256032"/>
-            <a:ext cx="1371600" cy="237744"/>
+            <a:ext cx="1463040" cy="237744"/>
           </a:xfrm>
           <a:prstGeom prst="rect">
             <a:avLst/>
@@ -9776,7 +10046,7 @@
         <p:spPr>
           <a:xfrm>
             <a:off x="457200" y="256032"/>
-            <a:ext cx="1371600" cy="237744"/>
+            <a:ext cx="1463040" cy="237744"/>
           </a:xfrm>
           <a:prstGeom prst="rect">
             <a:avLst/>
@@ -9997,7 +10267,7 @@
                   <a:srgbClr val="FF8A80"/>
                 </a:solidFill>
               </a:rPr>
-              <a:t>✗  3 separate tools open simultaneously</a:t>
+              <a:t>✗  4 separate tools open simultaneously</a:t>
             </a:r>
             <a:endParaRPr lang="en-US" sz="1100" dirty="0"/>
           </a:p>
@@ -10239,7 +10509,7 @@
                   <a:srgbClr val="69F0AE"/>
                 </a:solidFill>
               </a:rPr>
-              <a:t>✓  &lt; 30 seconds end-to-end pipeline run</a:t>
+              <a:t>✓  &lt; 30s pipeline — drag &amp; drop any log file</a:t>
             </a:r>
             <a:endParaRPr lang="en-US" sz="1100" dirty="0"/>
           </a:p>
@@ -10278,7 +10548,7 @@
                   <a:srgbClr val="69F0AE"/>
                 </a:solidFill>
               </a:rPr>
-              <a:t>✓  Drop files → full report automatically</a:t>
+              <a:t>✓  Streamlit UI — no CLI, no terminal needed</a:t>
             </a:r>
             <a:endParaRPr lang="en-US" sz="1100" dirty="0"/>
           </a:p>
@@ -10317,7 +10587,7 @@
                   <a:srgbClr val="69F0AE"/>
                 </a:solidFill>
               </a:rPr>
-              <a:t>✓  All sources unified on one timeline</a:t>
+              <a:t>✓  All 4 sources unified on one timeline</a:t>
             </a:r>
             <a:endParaRPr lang="en-US" sz="1100" dirty="0"/>
           </a:p>
@@ -10395,7 +10665,7 @@
                   <a:srgbClr val="69F0AE"/>
                 </a:solidFill>
               </a:rPr>
-              <a:t>✓  PDF + HTML report ready to share</a:t>
+              <a:t>✓  PDF + HTML report ready to share instantly</a:t>
             </a:r>
             <a:endParaRPr lang="en-US" sz="1100" dirty="0"/>
           </a:p>
@@ -10503,7 +10773,7 @@
         <p:spPr>
           <a:xfrm>
             <a:off x="457200" y="256032"/>
-            <a:ext cx="1371600" cy="237744"/>
+            <a:ext cx="1463040" cy="237744"/>
           </a:xfrm>
           <a:prstGeom prst="rect">
             <a:avLst/>
@@ -10528,7 +10798,7 @@
         <p:spPr>
           <a:xfrm>
             <a:off x="457200" y="256032"/>
-            <a:ext cx="1371600" cy="237744"/>
+            <a:ext cx="1463040" cy="237744"/>
           </a:xfrm>
           <a:prstGeom prst="rect">
             <a:avLst/>
@@ -10695,7 +10965,7 @@
         <p:spPr>
           <a:xfrm>
             <a:off x="301752" y="1664208"/>
-            <a:ext cx="1444752" cy="594360"/>
+            <a:ext cx="1444752" cy="566928"/>
           </a:xfrm>
           <a:prstGeom prst="rect">
             <a:avLst/>
@@ -10733,8 +11003,8 @@
         </p:nvSpPr>
         <p:spPr>
           <a:xfrm>
-            <a:off x="301752" y="2322576"/>
-            <a:ext cx="1444752" cy="594360"/>
+            <a:off x="301752" y="2286000"/>
+            <a:ext cx="1444752" cy="566928"/>
           </a:xfrm>
           <a:prstGeom prst="rect">
             <a:avLst/>
@@ -10772,8 +11042,8 @@
         </p:nvSpPr>
         <p:spPr>
           <a:xfrm>
-            <a:off x="301752" y="2980944"/>
-            <a:ext cx="1444752" cy="594360"/>
+            <a:off x="301752" y="2907792"/>
+            <a:ext cx="1444752" cy="566928"/>
           </a:xfrm>
           <a:prstGeom prst="rect">
             <a:avLst/>
@@ -10811,8 +11081,8 @@
         </p:nvSpPr>
         <p:spPr>
           <a:xfrm>
-            <a:off x="301752" y="3639312"/>
-            <a:ext cx="1444752" cy="594360"/>
+            <a:off x="301752" y="3529584"/>
+            <a:ext cx="1444752" cy="566928"/>
           </a:xfrm>
           <a:prstGeom prst="rect">
             <a:avLst/>
@@ -10844,7 +11114,46 @@
       </p:sp>
       <p:sp>
         <p:nvSpPr>
-          <p:cNvPr id="12" name="Shape 10"/>
+          <p:cNvPr id="12" name="Text 10"/>
+          <p:cNvSpPr/>
+          <p:nvPr/>
+        </p:nvSpPr>
+        <p:spPr>
+          <a:xfrm>
+            <a:off x="301752" y="4151376"/>
+            <a:ext cx="1444752" cy="566928"/>
+          </a:xfrm>
+          <a:prstGeom prst="rect">
+            <a:avLst/>
+          </a:prstGeom>
+          <a:noFill/>
+          <a:ln/>
+        </p:spPr>
+        <p:txBody>
+          <a:bodyPr wrap="square" rtlCol="0" anchor="ctr"/>
+          <a:lstStyle/>
+          <a:p>
+            <a:pPr indent="0" marL="0">
+              <a:lnSpc>
+                <a:spcPct val="120000"/>
+              </a:lnSpc>
+              <a:buNone/>
+            </a:pPr>
+            <a:r>
+              <a:rPr lang="en-US" sz="950" dirty="0">
+                <a:solidFill>
+                  <a:srgbClr val="7B9CB8"/>
+                </a:solidFill>
+              </a:rPr>
+              <a:t>›  SQL Server PerfMon CSV</a:t>
+            </a:r>
+            <a:endParaRPr lang="en-US" sz="950" dirty="0"/>
+          </a:p>
+        </p:txBody>
+      </p:sp>
+      <p:sp>
+        <p:nvSpPr>
+          <p:cNvPr id="13" name="Shape 11"/>
           <p:cNvSpPr/>
           <p:nvPr/>
         </p:nvSpPr>
@@ -10876,7 +11185,7 @@
       </p:sp>
       <p:sp>
         <p:nvSpPr>
-          <p:cNvPr id="13" name="Shape 11"/>
+          <p:cNvPr id="14" name="Shape 12"/>
           <p:cNvSpPr/>
           <p:nvPr/>
         </p:nvSpPr>
@@ -10903,7 +11212,7 @@
       </p:sp>
       <p:sp>
         <p:nvSpPr>
-          <p:cNvPr id="14" name="Text 12"/>
+          <p:cNvPr id="15" name="Text 13"/>
           <p:cNvSpPr/>
           <p:nvPr/>
         </p:nvSpPr>
@@ -10939,14 +11248,14 @@
       </p:sp>
       <p:sp>
         <p:nvSpPr>
-          <p:cNvPr id="15" name="Text 13"/>
+          <p:cNvPr id="16" name="Text 14"/>
           <p:cNvSpPr/>
           <p:nvPr/>
         </p:nvSpPr>
         <p:spPr>
           <a:xfrm>
             <a:off x="2066544" y="1664208"/>
-            <a:ext cx="1444752" cy="594360"/>
+            <a:ext cx="1444752" cy="566928"/>
           </a:xfrm>
           <a:prstGeom prst="rect">
             <a:avLst/>
@@ -10978,14 +11287,14 @@
       </p:sp>
       <p:sp>
         <p:nvSpPr>
-          <p:cNvPr id="16" name="Text 14"/>
-          <p:cNvSpPr/>
-          <p:nvPr/>
-        </p:nvSpPr>
-        <p:spPr>
-          <a:xfrm>
-            <a:off x="2066544" y="2322576"/>
-            <a:ext cx="1444752" cy="594360"/>
+          <p:cNvPr id="17" name="Text 15"/>
+          <p:cNvSpPr/>
+          <p:nvPr/>
+        </p:nvSpPr>
+        <p:spPr>
+          <a:xfrm>
+            <a:off x="2066544" y="2286000"/>
+            <a:ext cx="1444752" cy="566928"/>
           </a:xfrm>
           <a:prstGeom prst="rect">
             <a:avLst/>
@@ -11017,14 +11326,14 @@
       </p:sp>
       <p:sp>
         <p:nvSpPr>
-          <p:cNvPr id="17" name="Text 15"/>
-          <p:cNvSpPr/>
-          <p:nvPr/>
-        </p:nvSpPr>
-        <p:spPr>
-          <a:xfrm>
-            <a:off x="2066544" y="2980944"/>
-            <a:ext cx="1444752" cy="594360"/>
+          <p:cNvPr id="18" name="Text 16"/>
+          <p:cNvSpPr/>
+          <p:nvPr/>
+        </p:nvSpPr>
+        <p:spPr>
+          <a:xfrm>
+            <a:off x="2066544" y="2907792"/>
+            <a:ext cx="1444752" cy="566928"/>
           </a:xfrm>
           <a:prstGeom prst="rect">
             <a:avLst/>
@@ -11056,14 +11365,14 @@
       </p:sp>
       <p:sp>
         <p:nvSpPr>
-          <p:cNvPr id="18" name="Text 16"/>
-          <p:cNvSpPr/>
-          <p:nvPr/>
-        </p:nvSpPr>
-        <p:spPr>
-          <a:xfrm>
-            <a:off x="2066544" y="3639312"/>
-            <a:ext cx="1444752" cy="594360"/>
+          <p:cNvPr id="19" name="Text 17"/>
+          <p:cNvSpPr/>
+          <p:nvPr/>
+        </p:nvSpPr>
+        <p:spPr>
+          <a:xfrm>
+            <a:off x="2066544" y="3529584"/>
+            <a:ext cx="1444752" cy="566928"/>
           </a:xfrm>
           <a:prstGeom prst="rect">
             <a:avLst/>
@@ -11095,7 +11404,46 @@
       </p:sp>
       <p:sp>
         <p:nvSpPr>
-          <p:cNvPr id="19" name="Shape 17"/>
+          <p:cNvPr id="20" name="Text 18"/>
+          <p:cNvSpPr/>
+          <p:nvPr/>
+        </p:nvSpPr>
+        <p:spPr>
+          <a:xfrm>
+            <a:off x="2066544" y="4151376"/>
+            <a:ext cx="1444752" cy="566928"/>
+          </a:xfrm>
+          <a:prstGeom prst="rect">
+            <a:avLst/>
+          </a:prstGeom>
+          <a:noFill/>
+          <a:ln/>
+        </p:spPr>
+        <p:txBody>
+          <a:bodyPr wrap="square" rtlCol="0" anchor="ctr"/>
+          <a:lstStyle/>
+          <a:p>
+            <a:pPr indent="0" marL="0">
+              <a:lnSpc>
+                <a:spcPct val="120000"/>
+              </a:lnSpc>
+              <a:buNone/>
+            </a:pPr>
+            <a:r>
+              <a:rPr lang="en-US" sz="950" dirty="0">
+                <a:solidFill>
+                  <a:srgbClr val="7B9CB8"/>
+                </a:solidFill>
+              </a:rPr>
+              <a:t>›  UTC timestamp alignment</a:t>
+            </a:r>
+            <a:endParaRPr lang="en-US" sz="950" dirty="0"/>
+          </a:p>
+        </p:txBody>
+      </p:sp>
+      <p:sp>
+        <p:nvSpPr>
+          <p:cNvPr id="21" name="Shape 19"/>
           <p:cNvSpPr/>
           <p:nvPr/>
         </p:nvSpPr>
@@ -11127,7 +11475,7 @@
       </p:sp>
       <p:sp>
         <p:nvSpPr>
-          <p:cNvPr id="20" name="Shape 18"/>
+          <p:cNvPr id="22" name="Shape 20"/>
           <p:cNvSpPr/>
           <p:nvPr/>
         </p:nvSpPr>
@@ -11154,7 +11502,7 @@
       </p:sp>
       <p:sp>
         <p:nvSpPr>
-          <p:cNvPr id="21" name="Text 19"/>
+          <p:cNvPr id="23" name="Text 21"/>
           <p:cNvSpPr/>
           <p:nvPr/>
         </p:nvSpPr>
@@ -11190,14 +11538,14 @@
       </p:sp>
       <p:sp>
         <p:nvSpPr>
-          <p:cNvPr id="22" name="Text 20"/>
+          <p:cNvPr id="24" name="Text 22"/>
           <p:cNvSpPr/>
           <p:nvPr/>
         </p:nvSpPr>
         <p:spPr>
           <a:xfrm>
             <a:off x="3831336" y="1664208"/>
-            <a:ext cx="1444752" cy="594360"/>
+            <a:ext cx="1444752" cy="566928"/>
           </a:xfrm>
           <a:prstGeom prst="rect">
             <a:avLst/>
@@ -11229,14 +11577,14 @@
       </p:sp>
       <p:sp>
         <p:nvSpPr>
-          <p:cNvPr id="23" name="Text 21"/>
-          <p:cNvSpPr/>
-          <p:nvPr/>
-        </p:nvSpPr>
-        <p:spPr>
-          <a:xfrm>
-            <a:off x="3831336" y="2322576"/>
-            <a:ext cx="1444752" cy="594360"/>
+          <p:cNvPr id="25" name="Text 23"/>
+          <p:cNvSpPr/>
+          <p:nvPr/>
+        </p:nvSpPr>
+        <p:spPr>
+          <a:xfrm>
+            <a:off x="3831336" y="2286000"/>
+            <a:ext cx="1444752" cy="566928"/>
           </a:xfrm>
           <a:prstGeom prst="rect">
             <a:avLst/>
@@ -11268,14 +11616,14 @@
       </p:sp>
       <p:sp>
         <p:nvSpPr>
-          <p:cNvPr id="24" name="Text 22"/>
-          <p:cNvSpPr/>
-          <p:nvPr/>
-        </p:nvSpPr>
-        <p:spPr>
-          <a:xfrm>
-            <a:off x="3831336" y="2980944"/>
-            <a:ext cx="1444752" cy="594360"/>
+          <p:cNvPr id="26" name="Text 24"/>
+          <p:cNvSpPr/>
+          <p:nvPr/>
+        </p:nvSpPr>
+        <p:spPr>
+          <a:xfrm>
+            <a:off x="3831336" y="2907792"/>
+            <a:ext cx="1444752" cy="566928"/>
           </a:xfrm>
           <a:prstGeom prst="rect">
             <a:avLst/>
@@ -11307,14 +11655,14 @@
       </p:sp>
       <p:sp>
         <p:nvSpPr>
-          <p:cNvPr id="25" name="Text 23"/>
-          <p:cNvSpPr/>
-          <p:nvPr/>
-        </p:nvSpPr>
-        <p:spPr>
-          <a:xfrm>
-            <a:off x="3831336" y="3639312"/>
-            <a:ext cx="1444752" cy="594360"/>
+          <p:cNvPr id="27" name="Text 25"/>
+          <p:cNvSpPr/>
+          <p:nvPr/>
+        </p:nvSpPr>
+        <p:spPr>
+          <a:xfrm>
+            <a:off x="3831336" y="3529584"/>
+            <a:ext cx="1444752" cy="566928"/>
           </a:xfrm>
           <a:prstGeom prst="rect">
             <a:avLst/>
@@ -11338,7 +11686,7 @@
                   <a:srgbClr val="7B9CB8"/>
                 </a:solidFill>
               </a:rPr>
-              <a:t>›  Rule engine (SLA)</a:t>
+              <a:t>›  Rule engine (SLA + SQL SLA)</a:t>
             </a:r>
             <a:endParaRPr lang="en-US" sz="950" dirty="0"/>
           </a:p>
@@ -11346,7 +11694,7 @@
       </p:sp>
       <p:sp>
         <p:nvSpPr>
-          <p:cNvPr id="26" name="Shape 24"/>
+          <p:cNvPr id="28" name="Shape 26"/>
           <p:cNvSpPr/>
           <p:nvPr/>
         </p:nvSpPr>
@@ -11378,7 +11726,7 @@
       </p:sp>
       <p:sp>
         <p:nvSpPr>
-          <p:cNvPr id="27" name="Shape 25"/>
+          <p:cNvPr id="29" name="Shape 27"/>
           <p:cNvSpPr/>
           <p:nvPr/>
         </p:nvSpPr>
@@ -11405,7 +11753,7 @@
       </p:sp>
       <p:sp>
         <p:nvSpPr>
-          <p:cNvPr id="28" name="Text 26"/>
+          <p:cNvPr id="30" name="Text 28"/>
           <p:cNvSpPr/>
           <p:nvPr/>
         </p:nvSpPr>
@@ -11441,14 +11789,14 @@
       </p:sp>
       <p:sp>
         <p:nvSpPr>
-          <p:cNvPr id="29" name="Text 27"/>
+          <p:cNvPr id="31" name="Text 29"/>
           <p:cNvSpPr/>
           <p:nvPr/>
         </p:nvSpPr>
         <p:spPr>
           <a:xfrm>
             <a:off x="5596128" y="1664208"/>
-            <a:ext cx="1444752" cy="594360"/>
+            <a:ext cx="1444752" cy="566928"/>
           </a:xfrm>
           <a:prstGeom prst="rect">
             <a:avLst/>
@@ -11467,12 +11815,12 @@
               <a:buNone/>
             </a:pPr>
             <a:r>
-              <a:rPr lang="en-US" sz="950" dirty="0">
-                <a:solidFill>
-                  <a:srgbClr val="7B9CB8"/>
-                </a:solidFill>
-              </a:rPr>
-              <a:t>›  Jinja2 HTML templates</a:t>
+              <a:rPr lang="en-US" sz="950" b="1" dirty="0">
+                <a:solidFill>
+                  <a:srgbClr val="00C9A7"/>
+                </a:solidFill>
+              </a:rPr>
+              <a:t>›  Streamlit Web UI (new)</a:t>
             </a:r>
             <a:endParaRPr lang="en-US" sz="950" dirty="0"/>
           </a:p>
@@ -11480,14 +11828,14 @@
       </p:sp>
       <p:sp>
         <p:nvSpPr>
-          <p:cNvPr id="30" name="Text 28"/>
-          <p:cNvSpPr/>
-          <p:nvPr/>
-        </p:nvSpPr>
-        <p:spPr>
-          <a:xfrm>
-            <a:off x="5596128" y="2322576"/>
-            <a:ext cx="1444752" cy="594360"/>
+          <p:cNvPr id="32" name="Text 30"/>
+          <p:cNvSpPr/>
+          <p:nvPr/>
+        </p:nvSpPr>
+        <p:spPr>
+          <a:xfrm>
+            <a:off x="5596128" y="2286000"/>
+            <a:ext cx="1444752" cy="566928"/>
           </a:xfrm>
           <a:prstGeom prst="rect">
             <a:avLst/>
@@ -11511,7 +11859,7 @@
                   <a:srgbClr val="7B9CB8"/>
                 </a:solidFill>
               </a:rPr>
-              <a:t>›  WeasyPrint (PDF)</a:t>
+              <a:t>›  Jinja2 HTML templates</a:t>
             </a:r>
             <a:endParaRPr lang="en-US" sz="950" dirty="0"/>
           </a:p>
@@ -11519,14 +11867,14 @@
       </p:sp>
       <p:sp>
         <p:nvSpPr>
-          <p:cNvPr id="31" name="Text 29"/>
-          <p:cNvSpPr/>
-          <p:nvPr/>
-        </p:nvSpPr>
-        <p:spPr>
-          <a:xfrm>
-            <a:off x="5596128" y="2980944"/>
-            <a:ext cx="1444752" cy="594360"/>
+          <p:cNvPr id="33" name="Text 31"/>
+          <p:cNvSpPr/>
+          <p:nvPr/>
+        </p:nvSpPr>
+        <p:spPr>
+          <a:xfrm>
+            <a:off x="5596128" y="2907792"/>
+            <a:ext cx="1444752" cy="566928"/>
           </a:xfrm>
           <a:prstGeom prst="rect">
             <a:avLst/>
@@ -11550,7 +11898,7 @@
                   <a:srgbClr val="7B9CB8"/>
                 </a:solidFill>
               </a:rPr>
-              <a:t>›  Rich (terminal output)</a:t>
+              <a:t>›  xhtml2pdf (PDF export)</a:t>
             </a:r>
             <a:endParaRPr lang="en-US" sz="950" dirty="0"/>
           </a:p>
@@ -11558,14 +11906,14 @@
       </p:sp>
       <p:sp>
         <p:nvSpPr>
-          <p:cNvPr id="32" name="Text 30"/>
-          <p:cNvSpPr/>
-          <p:nvPr/>
-        </p:nvSpPr>
-        <p:spPr>
-          <a:xfrm>
-            <a:off x="5596128" y="3639312"/>
-            <a:ext cx="1444752" cy="594360"/>
+          <p:cNvPr id="34" name="Text 32"/>
+          <p:cNvSpPr/>
+          <p:nvPr/>
+        </p:nvSpPr>
+        <p:spPr>
+          <a:xfrm>
+            <a:off x="5596128" y="3529584"/>
+            <a:ext cx="1444752" cy="566928"/>
           </a:xfrm>
           <a:prstGeom prst="rect">
             <a:avLst/>
@@ -11597,7 +11945,7 @@
       </p:sp>
       <p:sp>
         <p:nvSpPr>
-          <p:cNvPr id="33" name="Shape 31"/>
+          <p:cNvPr id="35" name="Shape 33"/>
           <p:cNvSpPr/>
           <p:nvPr/>
         </p:nvSpPr>
@@ -11629,7 +11977,7 @@
       </p:sp>
       <p:sp>
         <p:nvSpPr>
-          <p:cNvPr id="34" name="Shape 32"/>
+          <p:cNvPr id="36" name="Shape 34"/>
           <p:cNvSpPr/>
           <p:nvPr/>
         </p:nvSpPr>
@@ -11656,7 +12004,7 @@
       </p:sp>
       <p:sp>
         <p:nvSpPr>
-          <p:cNvPr id="35" name="Text 33"/>
+          <p:cNvPr id="37" name="Text 35"/>
           <p:cNvSpPr/>
           <p:nvPr/>
         </p:nvSpPr>
@@ -11692,14 +12040,14 @@
       </p:sp>
       <p:sp>
         <p:nvSpPr>
-          <p:cNvPr id="36" name="Text 34"/>
+          <p:cNvPr id="38" name="Text 36"/>
           <p:cNvSpPr/>
           <p:nvPr/>
         </p:nvSpPr>
         <p:spPr>
           <a:xfrm>
             <a:off x="7360920" y="1664208"/>
-            <a:ext cx="1444752" cy="594360"/>
+            <a:ext cx="1444752" cy="566928"/>
           </a:xfrm>
           <a:prstGeom prst="rect">
             <a:avLst/>
@@ -11731,14 +12079,14 @@
       </p:sp>
       <p:sp>
         <p:nvSpPr>
-          <p:cNvPr id="37" name="Text 35"/>
-          <p:cNvSpPr/>
-          <p:nvPr/>
-        </p:nvSpPr>
-        <p:spPr>
-          <a:xfrm>
-            <a:off x="7360920" y="2322576"/>
-            <a:ext cx="1444752" cy="594360"/>
+          <p:cNvPr id="39" name="Text 37"/>
+          <p:cNvSpPr/>
+          <p:nvPr/>
+        </p:nvSpPr>
+        <p:spPr>
+          <a:xfrm>
+            <a:off x="7360920" y="2286000"/>
+            <a:ext cx="1444752" cy="566928"/>
           </a:xfrm>
           <a:prstGeom prst="rect">
             <a:avLst/>
@@ -11770,14 +12118,14 @@
       </p:sp>
       <p:sp>
         <p:nvSpPr>
-          <p:cNvPr id="38" name="Text 36"/>
-          <p:cNvSpPr/>
-          <p:nvPr/>
-        </p:nvSpPr>
-        <p:spPr>
-          <a:xfrm>
-            <a:off x="7360920" y="2980944"/>
-            <a:ext cx="1444752" cy="594360"/>
+          <p:cNvPr id="40" name="Text 38"/>
+          <p:cNvSpPr/>
+          <p:nvPr/>
+        </p:nvSpPr>
+        <p:spPr>
+          <a:xfrm>
+            <a:off x="7360920" y="2907792"/>
+            <a:ext cx="1444752" cy="566928"/>
           </a:xfrm>
           <a:prstGeom prst="rect">
             <a:avLst/>
@@ -11809,14 +12157,14 @@
       </p:sp>
       <p:sp>
         <p:nvSpPr>
-          <p:cNvPr id="39" name="Text 37"/>
-          <p:cNvSpPr/>
-          <p:nvPr/>
-        </p:nvSpPr>
-        <p:spPr>
-          <a:xfrm>
-            <a:off x="7360920" y="3639312"/>
-            <a:ext cx="1444752" cy="594360"/>
+          <p:cNvPr id="41" name="Text 39"/>
+          <p:cNvSpPr/>
+          <p:nvPr/>
+        </p:nvSpPr>
+        <p:spPr>
+          <a:xfrm>
+            <a:off x="7360920" y="3529584"/>
+            <a:ext cx="1444752" cy="566928"/>
           </a:xfrm>
           <a:prstGeom prst="rect">
             <a:avLst/>
@@ -11841,6 +12189,45 @@
                 </a:solidFill>
               </a:rPr>
               <a:t>›  VSCode launch configs</a:t>
+            </a:r>
+            <a:endParaRPr lang="en-US" sz="950" dirty="0"/>
+          </a:p>
+        </p:txBody>
+      </p:sp>
+      <p:sp>
+        <p:nvSpPr>
+          <p:cNvPr id="42" name="Text 40"/>
+          <p:cNvSpPr/>
+          <p:nvPr/>
+        </p:nvSpPr>
+        <p:spPr>
+          <a:xfrm>
+            <a:off x="7360920" y="4151376"/>
+            <a:ext cx="1444752" cy="566928"/>
+          </a:xfrm>
+          <a:prstGeom prst="rect">
+            <a:avLst/>
+          </a:prstGeom>
+          <a:noFill/>
+          <a:ln/>
+        </p:spPr>
+        <p:txBody>
+          <a:bodyPr wrap="square" rtlCol="0" anchor="ctr"/>
+          <a:lstStyle/>
+          <a:p>
+            <a:pPr indent="0" marL="0">
+              <a:lnSpc>
+                <a:spcPct val="120000"/>
+              </a:lnSpc>
+              <a:buNone/>
+            </a:pPr>
+            <a:r>
+              <a:rPr lang="en-US" sz="950" b="1" dirty="0">
+                <a:solidFill>
+                  <a:srgbClr val="00C9A7"/>
+                </a:solidFill>
+              </a:rPr>
+              <a:t>›  GitHub (sharmp44)</a:t>
             </a:r>
             <a:endParaRPr lang="en-US" sz="950" dirty="0"/>
           </a:p>
